--- a/docs/pptx/whole/ritu-linsubhr-sens-grade2.pptx
+++ b/docs/pptx/whole/ritu-linsubhr-sens-grade2.pptx
@@ -2443,7 +2443,7 @@
           </p:nvSpPr>
           <p:spPr>
             <a:xfrm>
-              <a:off x="2520195" y="2073503"/>
+              <a:off x="2520043" y="2073503"/>
               <a:ext cx="0" cy="3649639"/>
             </a:xfrm>
             <a:custGeom>
@@ -2486,7 +2486,7 @@
           </p:nvSpPr>
           <p:spPr>
             <a:xfrm>
-              <a:off x="4326850" y="2073503"/>
+              <a:off x="4325074" y="2073503"/>
               <a:ext cx="0" cy="3649639"/>
             </a:xfrm>
             <a:custGeom>
@@ -2529,7 +2529,7 @@
           </p:nvSpPr>
           <p:spPr>
             <a:xfrm>
-              <a:off x="6133505" y="2073503"/>
+              <a:off x="6130105" y="2073503"/>
               <a:ext cx="0" cy="3649639"/>
             </a:xfrm>
             <a:custGeom>
@@ -2572,7 +2572,7 @@
           </p:nvSpPr>
           <p:spPr>
             <a:xfrm>
-              <a:off x="7940161" y="2073503"/>
+              <a:off x="7935136" y="2073503"/>
               <a:ext cx="0" cy="3649639"/>
             </a:xfrm>
             <a:custGeom>
@@ -2830,7 +2830,7 @@
           </p:nvSpPr>
           <p:spPr>
             <a:xfrm>
-              <a:off x="1616868" y="2073503"/>
+              <a:off x="1617528" y="2073503"/>
               <a:ext cx="0" cy="3649639"/>
             </a:xfrm>
             <a:custGeom>
@@ -2873,7 +2873,7 @@
           </p:nvSpPr>
           <p:spPr>
             <a:xfrm>
-              <a:off x="3423523" y="2073503"/>
+              <a:off x="3422559" y="2073503"/>
               <a:ext cx="0" cy="3649639"/>
             </a:xfrm>
             <a:custGeom>
@@ -2916,7 +2916,7 @@
           </p:nvSpPr>
           <p:spPr>
             <a:xfrm>
-              <a:off x="5230178" y="2073503"/>
+              <a:off x="5227590" y="2073503"/>
               <a:ext cx="0" cy="3649639"/>
             </a:xfrm>
             <a:custGeom>
@@ -2959,7 +2959,7 @@
           </p:nvSpPr>
           <p:spPr>
             <a:xfrm>
-              <a:off x="7036833" y="2073503"/>
+              <a:off x="7032620" y="2073503"/>
               <a:ext cx="0" cy="3649639"/>
             </a:xfrm>
             <a:custGeom>
@@ -3002,612 +3002,612 @@
           </p:nvSpPr>
           <p:spPr>
             <a:xfrm>
-              <a:off x="1172049" y="3329168"/>
-              <a:ext cx="7090630" cy="1979988"/>
+              <a:off x="1172049" y="3304682"/>
+              <a:ext cx="7090630" cy="2007032"/>
             </a:xfrm>
             <a:custGeom>
               <a:avLst/>
               <a:pathLst>
-                <a:path w="7090630" h="1979988">
+                <a:path w="7090630" h="2007032">
                   <a:moveTo>
                     <a:pt x="0" y="0"/>
                   </a:moveTo>
                   <a:lnTo>
-                    <a:pt x="71622" y="48858"/>
-                  </a:lnTo>
-                  <a:lnTo>
-                    <a:pt x="143245" y="96646"/>
-                  </a:lnTo>
-                  <a:lnTo>
-                    <a:pt x="214867" y="143385"/>
-                  </a:lnTo>
-                  <a:lnTo>
-                    <a:pt x="286490" y="189100"/>
-                  </a:lnTo>
-                  <a:lnTo>
-                    <a:pt x="358112" y="233812"/>
-                  </a:lnTo>
-                  <a:lnTo>
-                    <a:pt x="429735" y="277544"/>
-                  </a:lnTo>
-                  <a:lnTo>
-                    <a:pt x="501357" y="320316"/>
-                  </a:lnTo>
-                  <a:lnTo>
-                    <a:pt x="572980" y="362151"/>
-                  </a:lnTo>
-                  <a:lnTo>
-                    <a:pt x="644602" y="403068"/>
-                  </a:lnTo>
-                  <a:lnTo>
-                    <a:pt x="716225" y="443088"/>
-                  </a:lnTo>
-                  <a:lnTo>
-                    <a:pt x="787847" y="482231"/>
-                  </a:lnTo>
-                  <a:lnTo>
-                    <a:pt x="859470" y="520515"/>
-                  </a:lnTo>
-                  <a:lnTo>
-                    <a:pt x="931092" y="557960"/>
-                  </a:lnTo>
-                  <a:lnTo>
-                    <a:pt x="1002715" y="594583"/>
-                  </a:lnTo>
-                  <a:lnTo>
-                    <a:pt x="1074337" y="630404"/>
-                  </a:lnTo>
-                  <a:lnTo>
-                    <a:pt x="1145960" y="665438"/>
-                  </a:lnTo>
-                  <a:lnTo>
-                    <a:pt x="1217582" y="699705"/>
-                  </a:lnTo>
-                  <a:lnTo>
-                    <a:pt x="1289205" y="733220"/>
-                  </a:lnTo>
-                  <a:lnTo>
-                    <a:pt x="1360827" y="766001"/>
-                  </a:lnTo>
-                  <a:lnTo>
-                    <a:pt x="1432450" y="798062"/>
-                  </a:lnTo>
-                  <a:lnTo>
-                    <a:pt x="1504073" y="829420"/>
-                  </a:lnTo>
-                  <a:lnTo>
-                    <a:pt x="1575695" y="860091"/>
-                  </a:lnTo>
-                  <a:lnTo>
-                    <a:pt x="1647318" y="890089"/>
-                  </a:lnTo>
-                  <a:lnTo>
-                    <a:pt x="1718940" y="919430"/>
-                  </a:lnTo>
-                  <a:lnTo>
-                    <a:pt x="1790563" y="948127"/>
-                  </a:lnTo>
-                  <a:lnTo>
-                    <a:pt x="1862185" y="976194"/>
-                  </a:lnTo>
-                  <a:lnTo>
-                    <a:pt x="1933808" y="1003647"/>
-                  </a:lnTo>
-                  <a:lnTo>
-                    <a:pt x="2005430" y="1030497"/>
-                  </a:lnTo>
-                  <a:lnTo>
-                    <a:pt x="2077053" y="1056758"/>
-                  </a:lnTo>
-                  <a:lnTo>
-                    <a:pt x="2148675" y="1082444"/>
-                  </a:lnTo>
-                  <a:lnTo>
-                    <a:pt x="2220298" y="1107566"/>
-                  </a:lnTo>
-                  <a:lnTo>
-                    <a:pt x="2291920" y="1132137"/>
-                  </a:lnTo>
-                  <a:lnTo>
-                    <a:pt x="2363543" y="1156170"/>
-                  </a:lnTo>
-                  <a:lnTo>
-                    <a:pt x="2435165" y="1179676"/>
-                  </a:lnTo>
-                  <a:lnTo>
-                    <a:pt x="2506788" y="1202666"/>
-                  </a:lnTo>
-                  <a:lnTo>
-                    <a:pt x="2578410" y="1225152"/>
-                  </a:lnTo>
-                  <a:lnTo>
-                    <a:pt x="2650033" y="1247145"/>
-                  </a:lnTo>
-                  <a:lnTo>
-                    <a:pt x="2721655" y="1268655"/>
-                  </a:lnTo>
-                  <a:lnTo>
-                    <a:pt x="2793278" y="1289694"/>
-                  </a:lnTo>
-                  <a:lnTo>
-                    <a:pt x="2864901" y="1310272"/>
-                  </a:lnTo>
-                  <a:lnTo>
-                    <a:pt x="2936523" y="1330398"/>
-                  </a:lnTo>
-                  <a:lnTo>
-                    <a:pt x="3008146" y="1350083"/>
-                  </a:lnTo>
-                  <a:lnTo>
-                    <a:pt x="3079768" y="1369336"/>
-                  </a:lnTo>
-                  <a:lnTo>
-                    <a:pt x="3151391" y="1388167"/>
-                  </a:lnTo>
-                  <a:lnTo>
-                    <a:pt x="3223013" y="1400320"/>
-                  </a:lnTo>
-                  <a:lnTo>
-                    <a:pt x="3294636" y="1404217"/>
-                  </a:lnTo>
-                  <a:lnTo>
-                    <a:pt x="3366258" y="1408095"/>
-                  </a:lnTo>
-                  <a:lnTo>
-                    <a:pt x="3437881" y="1411955"/>
-                  </a:lnTo>
-                  <a:lnTo>
-                    <a:pt x="3509503" y="1415797"/>
-                  </a:lnTo>
-                  <a:lnTo>
-                    <a:pt x="3581126" y="1419621"/>
-                  </a:lnTo>
-                  <a:lnTo>
-                    <a:pt x="3652748" y="1423427"/>
-                  </a:lnTo>
-                  <a:lnTo>
-                    <a:pt x="3724371" y="1427214"/>
-                  </a:lnTo>
-                  <a:lnTo>
-                    <a:pt x="3795993" y="1430985"/>
-                  </a:lnTo>
-                  <a:lnTo>
-                    <a:pt x="3867616" y="1434737"/>
-                  </a:lnTo>
-                  <a:lnTo>
-                    <a:pt x="3939238" y="1438472"/>
-                  </a:lnTo>
-                  <a:lnTo>
-                    <a:pt x="4010861" y="1442189"/>
-                  </a:lnTo>
-                  <a:lnTo>
-                    <a:pt x="4082483" y="1445888"/>
-                  </a:lnTo>
-                  <a:lnTo>
-                    <a:pt x="4154106" y="1449570"/>
-                  </a:lnTo>
-                  <a:lnTo>
-                    <a:pt x="4225729" y="1453235"/>
-                  </a:lnTo>
-                  <a:lnTo>
-                    <a:pt x="4297351" y="1456883"/>
-                  </a:lnTo>
-                  <a:lnTo>
-                    <a:pt x="4368974" y="1460513"/>
-                  </a:lnTo>
-                  <a:lnTo>
-                    <a:pt x="4440596" y="1464127"/>
-                  </a:lnTo>
-                  <a:lnTo>
-                    <a:pt x="4512219" y="1467723"/>
-                  </a:lnTo>
-                  <a:lnTo>
-                    <a:pt x="4583841" y="1471302"/>
-                  </a:lnTo>
-                  <a:lnTo>
-                    <a:pt x="4655464" y="1474865"/>
-                  </a:lnTo>
-                  <a:lnTo>
-                    <a:pt x="4727086" y="1478411"/>
-                  </a:lnTo>
-                  <a:lnTo>
-                    <a:pt x="4798709" y="1481940"/>
-                  </a:lnTo>
-                  <a:lnTo>
-                    <a:pt x="4870331" y="1485452"/>
-                  </a:lnTo>
-                  <a:lnTo>
-                    <a:pt x="4941954" y="1488948"/>
-                  </a:lnTo>
-                  <a:lnTo>
-                    <a:pt x="5013576" y="1492428"/>
-                  </a:lnTo>
-                  <a:lnTo>
-                    <a:pt x="5085199" y="1495891"/>
-                  </a:lnTo>
-                  <a:lnTo>
-                    <a:pt x="5156821" y="1499338"/>
-                  </a:lnTo>
-                  <a:lnTo>
-                    <a:pt x="5228444" y="1502768"/>
-                  </a:lnTo>
-                  <a:lnTo>
-                    <a:pt x="5300066" y="1506183"/>
-                  </a:lnTo>
-                  <a:lnTo>
-                    <a:pt x="5371689" y="1509581"/>
-                  </a:lnTo>
-                  <a:lnTo>
-                    <a:pt x="5443311" y="1512963"/>
-                  </a:lnTo>
-                  <a:lnTo>
-                    <a:pt x="5514934" y="1516330"/>
-                  </a:lnTo>
-                  <a:lnTo>
-                    <a:pt x="5586557" y="1519680"/>
-                  </a:lnTo>
-                  <a:lnTo>
-                    <a:pt x="5658179" y="1523015"/>
-                  </a:lnTo>
-                  <a:lnTo>
-                    <a:pt x="5729802" y="1526334"/>
-                  </a:lnTo>
-                  <a:lnTo>
-                    <a:pt x="5801424" y="1529638"/>
-                  </a:lnTo>
-                  <a:lnTo>
-                    <a:pt x="5873047" y="1532926"/>
-                  </a:lnTo>
-                  <a:lnTo>
-                    <a:pt x="5944669" y="1536198"/>
-                  </a:lnTo>
-                  <a:lnTo>
-                    <a:pt x="6016292" y="1539455"/>
-                  </a:lnTo>
-                  <a:lnTo>
-                    <a:pt x="6087914" y="1542697"/>
-                  </a:lnTo>
-                  <a:lnTo>
-                    <a:pt x="6159537" y="1545923"/>
-                  </a:lnTo>
-                  <a:lnTo>
-                    <a:pt x="6231159" y="1549135"/>
-                  </a:lnTo>
-                  <a:lnTo>
-                    <a:pt x="6302782" y="1552331"/>
-                  </a:lnTo>
-                  <a:lnTo>
-                    <a:pt x="6374404" y="1555512"/>
-                  </a:lnTo>
-                  <a:lnTo>
-                    <a:pt x="6446027" y="1558678"/>
-                  </a:lnTo>
-                  <a:lnTo>
-                    <a:pt x="6517649" y="1561829"/>
-                  </a:lnTo>
-                  <a:lnTo>
-                    <a:pt x="6589272" y="1564965"/>
-                  </a:lnTo>
-                  <a:lnTo>
-                    <a:pt x="6660894" y="1568087"/>
-                  </a:lnTo>
-                  <a:lnTo>
-                    <a:pt x="6732517" y="1571194"/>
-                  </a:lnTo>
-                  <a:lnTo>
-                    <a:pt x="6804139" y="1574286"/>
-                  </a:lnTo>
-                  <a:lnTo>
-                    <a:pt x="6875762" y="1577364"/>
-                  </a:lnTo>
-                  <a:lnTo>
-                    <a:pt x="6947385" y="1580427"/>
-                  </a:lnTo>
-                  <a:lnTo>
-                    <a:pt x="7019007" y="1583476"/>
-                  </a:lnTo>
-                  <a:lnTo>
-                    <a:pt x="7090630" y="1586511"/>
-                  </a:lnTo>
-                  <a:lnTo>
-                    <a:pt x="7090630" y="1979988"/>
-                  </a:lnTo>
-                  <a:lnTo>
-                    <a:pt x="7019007" y="1974426"/>
-                  </a:lnTo>
-                  <a:lnTo>
-                    <a:pt x="6947385" y="1968739"/>
-                  </a:lnTo>
-                  <a:lnTo>
-                    <a:pt x="6875762" y="1962925"/>
-                  </a:lnTo>
-                  <a:lnTo>
-                    <a:pt x="6804139" y="1956980"/>
-                  </a:lnTo>
-                  <a:lnTo>
-                    <a:pt x="6732517" y="1950901"/>
-                  </a:lnTo>
-                  <a:lnTo>
-                    <a:pt x="6660894" y="1944687"/>
-                  </a:lnTo>
-                  <a:lnTo>
-                    <a:pt x="6589272" y="1938333"/>
-                  </a:lnTo>
-                  <a:lnTo>
-                    <a:pt x="6517649" y="1931837"/>
-                  </a:lnTo>
-                  <a:lnTo>
-                    <a:pt x="6446027" y="1925195"/>
-                  </a:lnTo>
-                  <a:lnTo>
-                    <a:pt x="6374404" y="1918404"/>
-                  </a:lnTo>
-                  <a:lnTo>
-                    <a:pt x="6302782" y="1911461"/>
-                  </a:lnTo>
-                  <a:lnTo>
-                    <a:pt x="6231159" y="1904363"/>
-                  </a:lnTo>
-                  <a:lnTo>
-                    <a:pt x="6159537" y="1897105"/>
-                  </a:lnTo>
-                  <a:lnTo>
-                    <a:pt x="6087914" y="1889684"/>
-                  </a:lnTo>
-                  <a:lnTo>
-                    <a:pt x="6016292" y="1882097"/>
-                  </a:lnTo>
-                  <a:lnTo>
-                    <a:pt x="5944669" y="1874340"/>
-                  </a:lnTo>
-                  <a:lnTo>
-                    <a:pt x="5873047" y="1866409"/>
-                  </a:lnTo>
-                  <a:lnTo>
-                    <a:pt x="5801424" y="1858300"/>
-                  </a:lnTo>
-                  <a:lnTo>
-                    <a:pt x="5729802" y="1850010"/>
-                  </a:lnTo>
-                  <a:lnTo>
-                    <a:pt x="5658179" y="1841533"/>
-                  </a:lnTo>
-                  <a:lnTo>
-                    <a:pt x="5586557" y="1832867"/>
-                  </a:lnTo>
-                  <a:lnTo>
-                    <a:pt x="5514934" y="1824006"/>
-                  </a:lnTo>
-                  <a:lnTo>
-                    <a:pt x="5443311" y="1814946"/>
-                  </a:lnTo>
-                  <a:lnTo>
-                    <a:pt x="5371689" y="1805684"/>
-                  </a:lnTo>
-                  <a:lnTo>
-                    <a:pt x="5300066" y="1796213"/>
-                  </a:lnTo>
-                  <a:lnTo>
-                    <a:pt x="5228444" y="1786531"/>
-                  </a:lnTo>
-                  <a:lnTo>
-                    <a:pt x="5156821" y="1776631"/>
-                  </a:lnTo>
-                  <a:lnTo>
-                    <a:pt x="5085199" y="1766509"/>
-                  </a:lnTo>
-                  <a:lnTo>
-                    <a:pt x="5013576" y="1756161"/>
-                  </a:lnTo>
-                  <a:lnTo>
-                    <a:pt x="4941954" y="1745580"/>
-                  </a:lnTo>
-                  <a:lnTo>
-                    <a:pt x="4870331" y="1734762"/>
-                  </a:lnTo>
-                  <a:lnTo>
-                    <a:pt x="4798709" y="1723702"/>
-                  </a:lnTo>
-                  <a:lnTo>
-                    <a:pt x="4727086" y="1712394"/>
-                  </a:lnTo>
-                  <a:lnTo>
-                    <a:pt x="4655464" y="1700832"/>
-                  </a:lnTo>
-                  <a:lnTo>
-                    <a:pt x="4583841" y="1689011"/>
-                  </a:lnTo>
-                  <a:lnTo>
-                    <a:pt x="4512219" y="1676925"/>
-                  </a:lnTo>
-                  <a:lnTo>
-                    <a:pt x="4440596" y="1664568"/>
-                  </a:lnTo>
-                  <a:lnTo>
-                    <a:pt x="4368974" y="1651933"/>
-                  </a:lnTo>
-                  <a:lnTo>
-                    <a:pt x="4297351" y="1639016"/>
-                  </a:lnTo>
-                  <a:lnTo>
-                    <a:pt x="4225729" y="1625809"/>
-                  </a:lnTo>
-                  <a:lnTo>
-                    <a:pt x="4154106" y="1612306"/>
-                  </a:lnTo>
-                  <a:lnTo>
-                    <a:pt x="4082483" y="1598500"/>
-                  </a:lnTo>
-                  <a:lnTo>
-                    <a:pt x="4010861" y="1584385"/>
-                  </a:lnTo>
-                  <a:lnTo>
-                    <a:pt x="3939238" y="1569953"/>
-                  </a:lnTo>
-                  <a:lnTo>
-                    <a:pt x="3867616" y="1555197"/>
-                  </a:lnTo>
-                  <a:lnTo>
-                    <a:pt x="3795993" y="1540111"/>
-                  </a:lnTo>
-                  <a:lnTo>
-                    <a:pt x="3724371" y="1524687"/>
-                  </a:lnTo>
-                  <a:lnTo>
-                    <a:pt x="3652748" y="1508916"/>
-                  </a:lnTo>
-                  <a:lnTo>
-                    <a:pt x="3581126" y="1492792"/>
-                  </a:lnTo>
-                  <a:lnTo>
-                    <a:pt x="3509503" y="1476307"/>
-                  </a:lnTo>
-                  <a:lnTo>
-                    <a:pt x="3437881" y="1459452"/>
-                  </a:lnTo>
-                  <a:lnTo>
-                    <a:pt x="3366258" y="1442219"/>
-                  </a:lnTo>
-                  <a:lnTo>
-                    <a:pt x="3294636" y="1424600"/>
-                  </a:lnTo>
-                  <a:lnTo>
-                    <a:pt x="3223013" y="1406586"/>
-                  </a:lnTo>
-                  <a:lnTo>
-                    <a:pt x="3151391" y="1396405"/>
-                  </a:lnTo>
-                  <a:lnTo>
-                    <a:pt x="3079768" y="1392471"/>
-                  </a:lnTo>
-                  <a:lnTo>
-                    <a:pt x="3008146" y="1388519"/>
-                  </a:lnTo>
-                  <a:lnTo>
-                    <a:pt x="2936523" y="1384548"/>
-                  </a:lnTo>
-                  <a:lnTo>
-                    <a:pt x="2864901" y="1380558"/>
-                  </a:lnTo>
-                  <a:lnTo>
-                    <a:pt x="2793278" y="1376550"/>
-                  </a:lnTo>
-                  <a:lnTo>
-                    <a:pt x="2721655" y="1372522"/>
-                  </a:lnTo>
-                  <a:lnTo>
-                    <a:pt x="2650033" y="1368475"/>
-                  </a:lnTo>
-                  <a:lnTo>
-                    <a:pt x="2578410" y="1364410"/>
-                  </a:lnTo>
-                  <a:lnTo>
-                    <a:pt x="2506788" y="1360325"/>
-                  </a:lnTo>
-                  <a:lnTo>
-                    <a:pt x="2435165" y="1356220"/>
-                  </a:lnTo>
-                  <a:lnTo>
-                    <a:pt x="2363543" y="1352097"/>
-                  </a:lnTo>
-                  <a:lnTo>
-                    <a:pt x="2291920" y="1347953"/>
-                  </a:lnTo>
-                  <a:lnTo>
-                    <a:pt x="2220298" y="1343791"/>
-                  </a:lnTo>
-                  <a:lnTo>
-                    <a:pt x="2148675" y="1339608"/>
-                  </a:lnTo>
-                  <a:lnTo>
-                    <a:pt x="2077053" y="1335406"/>
-                  </a:lnTo>
-                  <a:lnTo>
-                    <a:pt x="2005430" y="1331184"/>
-                  </a:lnTo>
-                  <a:lnTo>
-                    <a:pt x="1933808" y="1326942"/>
-                  </a:lnTo>
-                  <a:lnTo>
-                    <a:pt x="1862185" y="1322679"/>
-                  </a:lnTo>
-                  <a:lnTo>
-                    <a:pt x="1790563" y="1318397"/>
-                  </a:lnTo>
-                  <a:lnTo>
-                    <a:pt x="1718940" y="1314094"/>
-                  </a:lnTo>
-                  <a:lnTo>
-                    <a:pt x="1647318" y="1309771"/>
-                  </a:lnTo>
-                  <a:lnTo>
-                    <a:pt x="1575695" y="1305428"/>
-                  </a:lnTo>
-                  <a:lnTo>
-                    <a:pt x="1504073" y="1301064"/>
-                  </a:lnTo>
-                  <a:lnTo>
-                    <a:pt x="1432450" y="1296680"/>
-                  </a:lnTo>
-                  <a:lnTo>
-                    <a:pt x="1360827" y="1292274"/>
-                  </a:lnTo>
-                  <a:lnTo>
-                    <a:pt x="1289205" y="1287848"/>
-                  </a:lnTo>
-                  <a:lnTo>
-                    <a:pt x="1217582" y="1283401"/>
-                  </a:lnTo>
-                  <a:lnTo>
-                    <a:pt x="1145960" y="1278933"/>
-                  </a:lnTo>
-                  <a:lnTo>
-                    <a:pt x="1074337" y="1274444"/>
-                  </a:lnTo>
-                  <a:lnTo>
-                    <a:pt x="1002715" y="1269933"/>
-                  </a:lnTo>
-                  <a:lnTo>
-                    <a:pt x="931092" y="1265401"/>
-                  </a:lnTo>
-                  <a:lnTo>
-                    <a:pt x="859470" y="1260848"/>
-                  </a:lnTo>
-                  <a:lnTo>
-                    <a:pt x="787847" y="1256273"/>
-                  </a:lnTo>
-                  <a:lnTo>
-                    <a:pt x="716225" y="1251677"/>
-                  </a:lnTo>
-                  <a:lnTo>
-                    <a:pt x="644602" y="1247059"/>
-                  </a:lnTo>
-                  <a:lnTo>
-                    <a:pt x="572980" y="1242419"/>
-                  </a:lnTo>
-                  <a:lnTo>
-                    <a:pt x="501357" y="1237757"/>
-                  </a:lnTo>
-                  <a:lnTo>
-                    <a:pt x="429735" y="1233073"/>
-                  </a:lnTo>
-                  <a:lnTo>
-                    <a:pt x="358112" y="1228366"/>
-                  </a:lnTo>
-                  <a:lnTo>
-                    <a:pt x="286490" y="1223638"/>
-                  </a:lnTo>
-                  <a:lnTo>
-                    <a:pt x="214867" y="1218887"/>
-                  </a:lnTo>
-                  <a:lnTo>
-                    <a:pt x="143245" y="1214114"/>
-                  </a:lnTo>
-                  <a:lnTo>
-                    <a:pt x="71622" y="1209318"/>
-                  </a:lnTo>
-                  <a:lnTo>
-                    <a:pt x="0" y="1204500"/>
+                    <a:pt x="71622" y="49869"/>
+                  </a:lnTo>
+                  <a:lnTo>
+                    <a:pt x="143245" y="98635"/>
+                  </a:lnTo>
+                  <a:lnTo>
+                    <a:pt x="214867" y="146320"/>
+                  </a:lnTo>
+                  <a:lnTo>
+                    <a:pt x="286490" y="192951"/>
+                  </a:lnTo>
+                  <a:lnTo>
+                    <a:pt x="358112" y="238549"/>
+                  </a:lnTo>
+                  <a:lnTo>
+                    <a:pt x="429735" y="283137"/>
+                  </a:lnTo>
+                  <a:lnTo>
+                    <a:pt x="501357" y="326738"/>
+                  </a:lnTo>
+                  <a:lnTo>
+                    <a:pt x="572980" y="369374"/>
+                  </a:lnTo>
+                  <a:lnTo>
+                    <a:pt x="644602" y="411066"/>
+                  </a:lnTo>
+                  <a:lnTo>
+                    <a:pt x="716225" y="451835"/>
+                  </a:lnTo>
+                  <a:lnTo>
+                    <a:pt x="787847" y="491701"/>
+                  </a:lnTo>
+                  <a:lnTo>
+                    <a:pt x="859470" y="530685"/>
+                  </a:lnTo>
+                  <a:lnTo>
+                    <a:pt x="931092" y="568806"/>
+                  </a:lnTo>
+                  <a:lnTo>
+                    <a:pt x="1002715" y="606083"/>
+                  </a:lnTo>
+                  <a:lnTo>
+                    <a:pt x="1074337" y="642534"/>
+                  </a:lnTo>
+                  <a:lnTo>
+                    <a:pt x="1145960" y="678179"/>
+                  </a:lnTo>
+                  <a:lnTo>
+                    <a:pt x="1217582" y="713034"/>
+                  </a:lnTo>
+                  <a:lnTo>
+                    <a:pt x="1289205" y="747118"/>
+                  </a:lnTo>
+                  <a:lnTo>
+                    <a:pt x="1360827" y="780447"/>
+                  </a:lnTo>
+                  <a:lnTo>
+                    <a:pt x="1432450" y="813038"/>
+                  </a:lnTo>
+                  <a:lnTo>
+                    <a:pt x="1504073" y="844908"/>
+                  </a:lnTo>
+                  <a:lnTo>
+                    <a:pt x="1575695" y="876072"/>
+                  </a:lnTo>
+                  <a:lnTo>
+                    <a:pt x="1647318" y="906546"/>
+                  </a:lnTo>
+                  <a:lnTo>
+                    <a:pt x="1718940" y="936346"/>
+                  </a:lnTo>
+                  <a:lnTo>
+                    <a:pt x="1790563" y="965486"/>
+                  </a:lnTo>
+                  <a:lnTo>
+                    <a:pt x="1862185" y="993980"/>
+                  </a:lnTo>
+                  <a:lnTo>
+                    <a:pt x="1933808" y="1021844"/>
+                  </a:lnTo>
+                  <a:lnTo>
+                    <a:pt x="2005430" y="1049091"/>
+                  </a:lnTo>
+                  <a:lnTo>
+                    <a:pt x="2077053" y="1075735"/>
+                  </a:lnTo>
+                  <a:lnTo>
+                    <a:pt x="2148675" y="1101789"/>
+                  </a:lnTo>
+                  <a:lnTo>
+                    <a:pt x="2220298" y="1127266"/>
+                  </a:lnTo>
+                  <a:lnTo>
+                    <a:pt x="2291920" y="1152179"/>
+                  </a:lnTo>
+                  <a:lnTo>
+                    <a:pt x="2363543" y="1176540"/>
+                  </a:lnTo>
+                  <a:lnTo>
+                    <a:pt x="2435165" y="1200363"/>
+                  </a:lnTo>
+                  <a:lnTo>
+                    <a:pt x="2506788" y="1223657"/>
+                  </a:lnTo>
+                  <a:lnTo>
+                    <a:pt x="2578410" y="1246436"/>
+                  </a:lnTo>
+                  <a:lnTo>
+                    <a:pt x="2650033" y="1268711"/>
+                  </a:lnTo>
+                  <a:lnTo>
+                    <a:pt x="2721655" y="1290493"/>
+                  </a:lnTo>
+                  <a:lnTo>
+                    <a:pt x="2793278" y="1311792"/>
+                  </a:lnTo>
+                  <a:lnTo>
+                    <a:pt x="2864901" y="1332620"/>
+                  </a:lnTo>
+                  <a:lnTo>
+                    <a:pt x="2936523" y="1352987"/>
+                  </a:lnTo>
+                  <a:lnTo>
+                    <a:pt x="3008146" y="1372902"/>
+                  </a:lnTo>
+                  <a:lnTo>
+                    <a:pt x="3079768" y="1392377"/>
+                  </a:lnTo>
+                  <a:lnTo>
+                    <a:pt x="3151391" y="1411421"/>
+                  </a:lnTo>
+                  <a:lnTo>
+                    <a:pt x="3223013" y="1424587"/>
+                  </a:lnTo>
+                  <a:lnTo>
+                    <a:pt x="3294636" y="1428527"/>
+                  </a:lnTo>
+                  <a:lnTo>
+                    <a:pt x="3366258" y="1432449"/>
+                  </a:lnTo>
+                  <a:lnTo>
+                    <a:pt x="3437881" y="1436351"/>
+                  </a:lnTo>
+                  <a:lnTo>
+                    <a:pt x="3509503" y="1440235"/>
+                  </a:lnTo>
+                  <a:lnTo>
+                    <a:pt x="3581126" y="1444101"/>
+                  </a:lnTo>
+                  <a:lnTo>
+                    <a:pt x="3652748" y="1447948"/>
+                  </a:lnTo>
+                  <a:lnTo>
+                    <a:pt x="3724371" y="1451777"/>
+                  </a:lnTo>
+                  <a:lnTo>
+                    <a:pt x="3795993" y="1455588"/>
+                  </a:lnTo>
+                  <a:lnTo>
+                    <a:pt x="3867616" y="1459381"/>
+                  </a:lnTo>
+                  <a:lnTo>
+                    <a:pt x="3939238" y="1463155"/>
+                  </a:lnTo>
+                  <a:lnTo>
+                    <a:pt x="4010861" y="1466912"/>
+                  </a:lnTo>
+                  <a:lnTo>
+                    <a:pt x="4082483" y="1470650"/>
+                  </a:lnTo>
+                  <a:lnTo>
+                    <a:pt x="4154106" y="1474371"/>
+                  </a:lnTo>
+                  <a:lnTo>
+                    <a:pt x="4225729" y="1478074"/>
+                  </a:lnTo>
+                  <a:lnTo>
+                    <a:pt x="4297351" y="1481760"/>
+                  </a:lnTo>
+                  <a:lnTo>
+                    <a:pt x="4368974" y="1485428"/>
+                  </a:lnTo>
+                  <a:lnTo>
+                    <a:pt x="4440596" y="1489079"/>
+                  </a:lnTo>
+                  <a:lnTo>
+                    <a:pt x="4512219" y="1492712"/>
+                  </a:lnTo>
+                  <a:lnTo>
+                    <a:pt x="4583841" y="1496328"/>
+                  </a:lnTo>
+                  <a:lnTo>
+                    <a:pt x="4655464" y="1499926"/>
+                  </a:lnTo>
+                  <a:lnTo>
+                    <a:pt x="4727086" y="1503508"/>
+                  </a:lnTo>
+                  <a:lnTo>
+                    <a:pt x="4798709" y="1507073"/>
+                  </a:lnTo>
+                  <a:lnTo>
+                    <a:pt x="4870331" y="1510620"/>
+                  </a:lnTo>
+                  <a:lnTo>
+                    <a:pt x="4941954" y="1514151"/>
+                  </a:lnTo>
+                  <a:lnTo>
+                    <a:pt x="5013576" y="1517665"/>
+                  </a:lnTo>
+                  <a:lnTo>
+                    <a:pt x="5085199" y="1521162"/>
+                  </a:lnTo>
+                  <a:lnTo>
+                    <a:pt x="5156821" y="1524642"/>
+                  </a:lnTo>
+                  <a:lnTo>
+                    <a:pt x="5228444" y="1528106"/>
+                  </a:lnTo>
+                  <a:lnTo>
+                    <a:pt x="5300066" y="1531554"/>
+                  </a:lnTo>
+                  <a:lnTo>
+                    <a:pt x="5371689" y="1534985"/>
+                  </a:lnTo>
+                  <a:lnTo>
+                    <a:pt x="5443311" y="1538400"/>
+                  </a:lnTo>
+                  <a:lnTo>
+                    <a:pt x="5514934" y="1541798"/>
+                  </a:lnTo>
+                  <a:lnTo>
+                    <a:pt x="5586557" y="1545181"/>
+                  </a:lnTo>
+                  <a:lnTo>
+                    <a:pt x="5658179" y="1548547"/>
+                  </a:lnTo>
+                  <a:lnTo>
+                    <a:pt x="5729802" y="1551897"/>
+                  </a:lnTo>
+                  <a:lnTo>
+                    <a:pt x="5801424" y="1555231"/>
+                  </a:lnTo>
+                  <a:lnTo>
+                    <a:pt x="5873047" y="1558550"/>
+                  </a:lnTo>
+                  <a:lnTo>
+                    <a:pt x="5944669" y="1561852"/>
+                  </a:lnTo>
+                  <a:lnTo>
+                    <a:pt x="6016292" y="1565139"/>
+                  </a:lnTo>
+                  <a:lnTo>
+                    <a:pt x="6087914" y="1568410"/>
+                  </a:lnTo>
+                  <a:lnTo>
+                    <a:pt x="6159537" y="1571666"/>
+                  </a:lnTo>
+                  <a:lnTo>
+                    <a:pt x="6231159" y="1574906"/>
+                  </a:lnTo>
+                  <a:lnTo>
+                    <a:pt x="6302782" y="1578131"/>
+                  </a:lnTo>
+                  <a:lnTo>
+                    <a:pt x="6374404" y="1581341"/>
+                  </a:lnTo>
+                  <a:lnTo>
+                    <a:pt x="6446027" y="1584535"/>
+                  </a:lnTo>
+                  <a:lnTo>
+                    <a:pt x="6517649" y="1587714"/>
+                  </a:lnTo>
+                  <a:lnTo>
+                    <a:pt x="6589272" y="1590878"/>
+                  </a:lnTo>
+                  <a:lnTo>
+                    <a:pt x="6660894" y="1594026"/>
+                  </a:lnTo>
+                  <a:lnTo>
+                    <a:pt x="6732517" y="1597160"/>
+                  </a:lnTo>
+                  <a:lnTo>
+                    <a:pt x="6804139" y="1600279"/>
+                  </a:lnTo>
+                  <a:lnTo>
+                    <a:pt x="6875762" y="1603383"/>
+                  </a:lnTo>
+                  <a:lnTo>
+                    <a:pt x="6947385" y="1606472"/>
+                  </a:lnTo>
+                  <a:lnTo>
+                    <a:pt x="7019007" y="1609547"/>
+                  </a:lnTo>
+                  <a:lnTo>
+                    <a:pt x="7090630" y="1612607"/>
+                  </a:lnTo>
+                  <a:lnTo>
+                    <a:pt x="7090630" y="2007032"/>
+                  </a:lnTo>
+                  <a:lnTo>
+                    <a:pt x="7019007" y="2001473"/>
+                  </a:lnTo>
+                  <a:lnTo>
+                    <a:pt x="6947385" y="1995788"/>
+                  </a:lnTo>
+                  <a:lnTo>
+                    <a:pt x="6875762" y="1989975"/>
+                  </a:lnTo>
+                  <a:lnTo>
+                    <a:pt x="6804139" y="1984030"/>
+                  </a:lnTo>
+                  <a:lnTo>
+                    <a:pt x="6732517" y="1977950"/>
+                  </a:lnTo>
+                  <a:lnTo>
+                    <a:pt x="6660894" y="1971733"/>
+                  </a:lnTo>
+                  <a:lnTo>
+                    <a:pt x="6589272" y="1965374"/>
+                  </a:lnTo>
+                  <a:lnTo>
+                    <a:pt x="6517649" y="1958872"/>
+                  </a:lnTo>
+                  <a:lnTo>
+                    <a:pt x="6446027" y="1952223"/>
+                  </a:lnTo>
+                  <a:lnTo>
+                    <a:pt x="6374404" y="1945423"/>
+                  </a:lnTo>
+                  <a:lnTo>
+                    <a:pt x="6302782" y="1938469"/>
+                  </a:lnTo>
+                  <a:lnTo>
+                    <a:pt x="6231159" y="1931358"/>
+                  </a:lnTo>
+                  <a:lnTo>
+                    <a:pt x="6159537" y="1924086"/>
+                  </a:lnTo>
+                  <a:lnTo>
+                    <a:pt x="6087914" y="1916649"/>
+                  </a:lnTo>
+                  <a:lnTo>
+                    <a:pt x="6016292" y="1909044"/>
+                  </a:lnTo>
+                  <a:lnTo>
+                    <a:pt x="5944669" y="1901266"/>
+                  </a:lnTo>
+                  <a:lnTo>
+                    <a:pt x="5873047" y="1893313"/>
+                  </a:lnTo>
+                  <a:lnTo>
+                    <a:pt x="5801424" y="1885179"/>
+                  </a:lnTo>
+                  <a:lnTo>
+                    <a:pt x="5729802" y="1876861"/>
+                  </a:lnTo>
+                  <a:lnTo>
+                    <a:pt x="5658179" y="1868355"/>
+                  </a:lnTo>
+                  <a:lnTo>
+                    <a:pt x="5586557" y="1859657"/>
+                  </a:lnTo>
+                  <a:lnTo>
+                    <a:pt x="5514934" y="1850761"/>
+                  </a:lnTo>
+                  <a:lnTo>
+                    <a:pt x="5443311" y="1841664"/>
+                  </a:lnTo>
+                  <a:lnTo>
+                    <a:pt x="5371689" y="1832361"/>
+                  </a:lnTo>
+                  <a:lnTo>
+                    <a:pt x="5300066" y="1822847"/>
+                  </a:lnTo>
+                  <a:lnTo>
+                    <a:pt x="5228444" y="1813118"/>
+                  </a:lnTo>
+                  <a:lnTo>
+                    <a:pt x="5156821" y="1803169"/>
+                  </a:lnTo>
+                  <a:lnTo>
+                    <a:pt x="5085199" y="1792995"/>
+                  </a:lnTo>
+                  <a:lnTo>
+                    <a:pt x="5013576" y="1782590"/>
+                  </a:lnTo>
+                  <a:lnTo>
+                    <a:pt x="4941954" y="1771950"/>
+                  </a:lnTo>
+                  <a:lnTo>
+                    <a:pt x="4870331" y="1761068"/>
+                  </a:lnTo>
+                  <a:lnTo>
+                    <a:pt x="4798709" y="1749941"/>
+                  </a:lnTo>
+                  <a:lnTo>
+                    <a:pt x="4727086" y="1738561"/>
+                  </a:lnTo>
+                  <a:lnTo>
+                    <a:pt x="4655464" y="1726924"/>
+                  </a:lnTo>
+                  <a:lnTo>
+                    <a:pt x="4583841" y="1715023"/>
+                  </a:lnTo>
+                  <a:lnTo>
+                    <a:pt x="4512219" y="1702853"/>
+                  </a:lnTo>
+                  <a:lnTo>
+                    <a:pt x="4440596" y="1690407"/>
+                  </a:lnTo>
+                  <a:lnTo>
+                    <a:pt x="4368974" y="1677680"/>
+                  </a:lnTo>
+                  <a:lnTo>
+                    <a:pt x="4297351" y="1664664"/>
+                  </a:lnTo>
+                  <a:lnTo>
+                    <a:pt x="4225729" y="1651354"/>
+                  </a:lnTo>
+                  <a:lnTo>
+                    <a:pt x="4154106" y="1637743"/>
+                  </a:lnTo>
+                  <a:lnTo>
+                    <a:pt x="4082483" y="1623823"/>
+                  </a:lnTo>
+                  <a:lnTo>
+                    <a:pt x="4010861" y="1609588"/>
+                  </a:lnTo>
+                  <a:lnTo>
+                    <a:pt x="3939238" y="1595031"/>
+                  </a:lnTo>
+                  <a:lnTo>
+                    <a:pt x="3867616" y="1580144"/>
+                  </a:lnTo>
+                  <a:lnTo>
+                    <a:pt x="3795993" y="1564920"/>
+                  </a:lnTo>
+                  <a:lnTo>
+                    <a:pt x="3724371" y="1549352"/>
+                  </a:lnTo>
+                  <a:lnTo>
+                    <a:pt x="3652748" y="1533431"/>
+                  </a:lnTo>
+                  <a:lnTo>
+                    <a:pt x="3581126" y="1517149"/>
+                  </a:lnTo>
+                  <a:lnTo>
+                    <a:pt x="3509503" y="1500499"/>
+                  </a:lnTo>
+                  <a:lnTo>
+                    <a:pt x="3437881" y="1483472"/>
+                  </a:lnTo>
+                  <a:lnTo>
+                    <a:pt x="3366258" y="1466060"/>
+                  </a:lnTo>
+                  <a:lnTo>
+                    <a:pt x="3294636" y="1448253"/>
+                  </a:lnTo>
+                  <a:lnTo>
+                    <a:pt x="3223013" y="1430043"/>
+                  </a:lnTo>
+                  <a:lnTo>
+                    <a:pt x="3151391" y="1420628"/>
+                  </a:lnTo>
+                  <a:lnTo>
+                    <a:pt x="3079768" y="1416650"/>
+                  </a:lnTo>
+                  <a:lnTo>
+                    <a:pt x="3008146" y="1412653"/>
+                  </a:lnTo>
+                  <a:lnTo>
+                    <a:pt x="2936523" y="1408637"/>
+                  </a:lnTo>
+                  <a:lnTo>
+                    <a:pt x="2864901" y="1404602"/>
+                  </a:lnTo>
+                  <a:lnTo>
+                    <a:pt x="2793278" y="1400548"/>
+                  </a:lnTo>
+                  <a:lnTo>
+                    <a:pt x="2721655" y="1396474"/>
+                  </a:lnTo>
+                  <a:lnTo>
+                    <a:pt x="2650033" y="1392380"/>
+                  </a:lnTo>
+                  <a:lnTo>
+                    <a:pt x="2578410" y="1388268"/>
+                  </a:lnTo>
+                  <a:lnTo>
+                    <a:pt x="2506788" y="1384135"/>
+                  </a:lnTo>
+                  <a:lnTo>
+                    <a:pt x="2435165" y="1379983"/>
+                  </a:lnTo>
+                  <a:lnTo>
+                    <a:pt x="2363543" y="1375810"/>
+                  </a:lnTo>
+                  <a:lnTo>
+                    <a:pt x="2291920" y="1371618"/>
+                  </a:lnTo>
+                  <a:lnTo>
+                    <a:pt x="2220298" y="1367406"/>
+                  </a:lnTo>
+                  <a:lnTo>
+                    <a:pt x="2148675" y="1363174"/>
+                  </a:lnTo>
+                  <a:lnTo>
+                    <a:pt x="2077053" y="1358921"/>
+                  </a:lnTo>
+                  <a:lnTo>
+                    <a:pt x="2005430" y="1354648"/>
+                  </a:lnTo>
+                  <a:lnTo>
+                    <a:pt x="1933808" y="1350355"/>
+                  </a:lnTo>
+                  <a:lnTo>
+                    <a:pt x="1862185" y="1346041"/>
+                  </a:lnTo>
+                  <a:lnTo>
+                    <a:pt x="1790563" y="1341706"/>
+                  </a:lnTo>
+                  <a:lnTo>
+                    <a:pt x="1718940" y="1337351"/>
+                  </a:lnTo>
+                  <a:lnTo>
+                    <a:pt x="1647318" y="1332975"/>
+                  </a:lnTo>
+                  <a:lnTo>
+                    <a:pt x="1575695" y="1328578"/>
+                  </a:lnTo>
+                  <a:lnTo>
+                    <a:pt x="1504073" y="1324160"/>
+                  </a:lnTo>
+                  <a:lnTo>
+                    <a:pt x="1432450" y="1319721"/>
+                  </a:lnTo>
+                  <a:lnTo>
+                    <a:pt x="1360827" y="1315261"/>
+                  </a:lnTo>
+                  <a:lnTo>
+                    <a:pt x="1289205" y="1310779"/>
+                  </a:lnTo>
+                  <a:lnTo>
+                    <a:pt x="1217582" y="1306276"/>
+                  </a:lnTo>
+                  <a:lnTo>
+                    <a:pt x="1145960" y="1301751"/>
+                  </a:lnTo>
+                  <a:lnTo>
+                    <a:pt x="1074337" y="1297205"/>
+                  </a:lnTo>
+                  <a:lnTo>
+                    <a:pt x="1002715" y="1292637"/>
+                  </a:lnTo>
+                  <a:lnTo>
+                    <a:pt x="931092" y="1288047"/>
+                  </a:lnTo>
+                  <a:lnTo>
+                    <a:pt x="859470" y="1283435"/>
+                  </a:lnTo>
+                  <a:lnTo>
+                    <a:pt x="787847" y="1278801"/>
+                  </a:lnTo>
+                  <a:lnTo>
+                    <a:pt x="716225" y="1274145"/>
+                  </a:lnTo>
+                  <a:lnTo>
+                    <a:pt x="644602" y="1269467"/>
+                  </a:lnTo>
+                  <a:lnTo>
+                    <a:pt x="572980" y="1264766"/>
+                  </a:lnTo>
+                  <a:lnTo>
+                    <a:pt x="501357" y="1260043"/>
+                  </a:lnTo>
+                  <a:lnTo>
+                    <a:pt x="429735" y="1255298"/>
+                  </a:lnTo>
+                  <a:lnTo>
+                    <a:pt x="358112" y="1250529"/>
+                  </a:lnTo>
+                  <a:lnTo>
+                    <a:pt x="286490" y="1245738"/>
+                  </a:lnTo>
+                  <a:lnTo>
+                    <a:pt x="214867" y="1240924"/>
+                  </a:lnTo>
+                  <a:lnTo>
+                    <a:pt x="143245" y="1236087"/>
+                  </a:lnTo>
+                  <a:lnTo>
+                    <a:pt x="71622" y="1231227"/>
+                  </a:lnTo>
+                  <a:lnTo>
+                    <a:pt x="0" y="1226343"/>
                   </a:lnTo>
                   <a:close/>
                 </a:path>
@@ -3633,312 +3633,312 @@
           </p:nvSpPr>
           <p:spPr>
             <a:xfrm>
-              <a:off x="1172049" y="3329168"/>
-              <a:ext cx="7090630" cy="1586511"/>
+              <a:off x="1172049" y="3304682"/>
+              <a:ext cx="7090630" cy="1612607"/>
             </a:xfrm>
             <a:custGeom>
               <a:avLst/>
               <a:pathLst>
-                <a:path w="7090630" h="1586511">
+                <a:path w="7090630" h="1612607">
                   <a:moveTo>
                     <a:pt x="0" y="0"/>
                   </a:moveTo>
                   <a:lnTo>
-                    <a:pt x="71622" y="48858"/>
-                  </a:lnTo>
-                  <a:lnTo>
-                    <a:pt x="143245" y="96646"/>
-                  </a:lnTo>
-                  <a:lnTo>
-                    <a:pt x="214867" y="143385"/>
-                  </a:lnTo>
-                  <a:lnTo>
-                    <a:pt x="286490" y="189100"/>
-                  </a:lnTo>
-                  <a:lnTo>
-                    <a:pt x="358112" y="233812"/>
-                  </a:lnTo>
-                  <a:lnTo>
-                    <a:pt x="429735" y="277544"/>
-                  </a:lnTo>
-                  <a:lnTo>
-                    <a:pt x="501357" y="320316"/>
-                  </a:lnTo>
-                  <a:lnTo>
-                    <a:pt x="572980" y="362151"/>
-                  </a:lnTo>
-                  <a:lnTo>
-                    <a:pt x="644602" y="403068"/>
-                  </a:lnTo>
-                  <a:lnTo>
-                    <a:pt x="716225" y="443088"/>
-                  </a:lnTo>
-                  <a:lnTo>
-                    <a:pt x="787847" y="482231"/>
-                  </a:lnTo>
-                  <a:lnTo>
-                    <a:pt x="859470" y="520515"/>
-                  </a:lnTo>
-                  <a:lnTo>
-                    <a:pt x="931092" y="557960"/>
-                  </a:lnTo>
-                  <a:lnTo>
-                    <a:pt x="1002715" y="594583"/>
-                  </a:lnTo>
-                  <a:lnTo>
-                    <a:pt x="1074337" y="630404"/>
-                  </a:lnTo>
-                  <a:lnTo>
-                    <a:pt x="1145960" y="665438"/>
-                  </a:lnTo>
-                  <a:lnTo>
-                    <a:pt x="1217582" y="699705"/>
-                  </a:lnTo>
-                  <a:lnTo>
-                    <a:pt x="1289205" y="733220"/>
-                  </a:lnTo>
-                  <a:lnTo>
-                    <a:pt x="1360827" y="766001"/>
-                  </a:lnTo>
-                  <a:lnTo>
-                    <a:pt x="1432450" y="798062"/>
-                  </a:lnTo>
-                  <a:lnTo>
-                    <a:pt x="1504073" y="829420"/>
-                  </a:lnTo>
-                  <a:lnTo>
-                    <a:pt x="1575695" y="860091"/>
-                  </a:lnTo>
-                  <a:lnTo>
-                    <a:pt x="1647318" y="890089"/>
-                  </a:lnTo>
-                  <a:lnTo>
-                    <a:pt x="1718940" y="919430"/>
-                  </a:lnTo>
-                  <a:lnTo>
-                    <a:pt x="1790563" y="948127"/>
-                  </a:lnTo>
-                  <a:lnTo>
-                    <a:pt x="1862185" y="976194"/>
-                  </a:lnTo>
-                  <a:lnTo>
-                    <a:pt x="1933808" y="1003647"/>
-                  </a:lnTo>
-                  <a:lnTo>
-                    <a:pt x="2005430" y="1030497"/>
-                  </a:lnTo>
-                  <a:lnTo>
-                    <a:pt x="2077053" y="1056758"/>
-                  </a:lnTo>
-                  <a:lnTo>
-                    <a:pt x="2148675" y="1082444"/>
-                  </a:lnTo>
-                  <a:lnTo>
-                    <a:pt x="2220298" y="1107566"/>
-                  </a:lnTo>
-                  <a:lnTo>
-                    <a:pt x="2291920" y="1132137"/>
-                  </a:lnTo>
-                  <a:lnTo>
-                    <a:pt x="2363543" y="1156170"/>
-                  </a:lnTo>
-                  <a:lnTo>
-                    <a:pt x="2435165" y="1179676"/>
-                  </a:lnTo>
-                  <a:lnTo>
-                    <a:pt x="2506788" y="1202666"/>
-                  </a:lnTo>
-                  <a:lnTo>
-                    <a:pt x="2578410" y="1225152"/>
-                  </a:lnTo>
-                  <a:lnTo>
-                    <a:pt x="2650033" y="1247145"/>
-                  </a:lnTo>
-                  <a:lnTo>
-                    <a:pt x="2721655" y="1268655"/>
-                  </a:lnTo>
-                  <a:lnTo>
-                    <a:pt x="2793278" y="1289694"/>
-                  </a:lnTo>
-                  <a:lnTo>
-                    <a:pt x="2864901" y="1310272"/>
-                  </a:lnTo>
-                  <a:lnTo>
-                    <a:pt x="2936523" y="1330398"/>
-                  </a:lnTo>
-                  <a:lnTo>
-                    <a:pt x="3008146" y="1350083"/>
-                  </a:lnTo>
-                  <a:lnTo>
-                    <a:pt x="3079768" y="1369336"/>
-                  </a:lnTo>
-                  <a:lnTo>
-                    <a:pt x="3151391" y="1388167"/>
-                  </a:lnTo>
-                  <a:lnTo>
-                    <a:pt x="3223013" y="1400320"/>
-                  </a:lnTo>
-                  <a:lnTo>
-                    <a:pt x="3294636" y="1404217"/>
-                  </a:lnTo>
-                  <a:lnTo>
-                    <a:pt x="3366258" y="1408095"/>
-                  </a:lnTo>
-                  <a:lnTo>
-                    <a:pt x="3437881" y="1411955"/>
-                  </a:lnTo>
-                  <a:lnTo>
-                    <a:pt x="3509503" y="1415797"/>
-                  </a:lnTo>
-                  <a:lnTo>
-                    <a:pt x="3581126" y="1419621"/>
-                  </a:lnTo>
-                  <a:lnTo>
-                    <a:pt x="3652748" y="1423427"/>
-                  </a:lnTo>
-                  <a:lnTo>
-                    <a:pt x="3724371" y="1427214"/>
-                  </a:lnTo>
-                  <a:lnTo>
-                    <a:pt x="3795993" y="1430985"/>
-                  </a:lnTo>
-                  <a:lnTo>
-                    <a:pt x="3867616" y="1434737"/>
-                  </a:lnTo>
-                  <a:lnTo>
-                    <a:pt x="3939238" y="1438472"/>
-                  </a:lnTo>
-                  <a:lnTo>
-                    <a:pt x="4010861" y="1442189"/>
-                  </a:lnTo>
-                  <a:lnTo>
-                    <a:pt x="4082483" y="1445888"/>
-                  </a:lnTo>
-                  <a:lnTo>
-                    <a:pt x="4154106" y="1449570"/>
-                  </a:lnTo>
-                  <a:lnTo>
-                    <a:pt x="4225729" y="1453235"/>
-                  </a:lnTo>
-                  <a:lnTo>
-                    <a:pt x="4297351" y="1456883"/>
-                  </a:lnTo>
-                  <a:lnTo>
-                    <a:pt x="4368974" y="1460513"/>
-                  </a:lnTo>
-                  <a:lnTo>
-                    <a:pt x="4440596" y="1464127"/>
-                  </a:lnTo>
-                  <a:lnTo>
-                    <a:pt x="4512219" y="1467723"/>
-                  </a:lnTo>
-                  <a:lnTo>
-                    <a:pt x="4583841" y="1471302"/>
-                  </a:lnTo>
-                  <a:lnTo>
-                    <a:pt x="4655464" y="1474865"/>
-                  </a:lnTo>
-                  <a:lnTo>
-                    <a:pt x="4727086" y="1478411"/>
-                  </a:lnTo>
-                  <a:lnTo>
-                    <a:pt x="4798709" y="1481940"/>
-                  </a:lnTo>
-                  <a:lnTo>
-                    <a:pt x="4870331" y="1485452"/>
-                  </a:lnTo>
-                  <a:lnTo>
-                    <a:pt x="4941954" y="1488948"/>
-                  </a:lnTo>
-                  <a:lnTo>
-                    <a:pt x="5013576" y="1492428"/>
-                  </a:lnTo>
-                  <a:lnTo>
-                    <a:pt x="5085199" y="1495891"/>
-                  </a:lnTo>
-                  <a:lnTo>
-                    <a:pt x="5156821" y="1499338"/>
-                  </a:lnTo>
-                  <a:lnTo>
-                    <a:pt x="5228444" y="1502768"/>
-                  </a:lnTo>
-                  <a:lnTo>
-                    <a:pt x="5300066" y="1506183"/>
-                  </a:lnTo>
-                  <a:lnTo>
-                    <a:pt x="5371689" y="1509581"/>
-                  </a:lnTo>
-                  <a:lnTo>
-                    <a:pt x="5443311" y="1512963"/>
-                  </a:lnTo>
-                  <a:lnTo>
-                    <a:pt x="5514934" y="1516330"/>
-                  </a:lnTo>
-                  <a:lnTo>
-                    <a:pt x="5586557" y="1519680"/>
-                  </a:lnTo>
-                  <a:lnTo>
-                    <a:pt x="5658179" y="1523015"/>
-                  </a:lnTo>
-                  <a:lnTo>
-                    <a:pt x="5729802" y="1526334"/>
-                  </a:lnTo>
-                  <a:lnTo>
-                    <a:pt x="5801424" y="1529638"/>
-                  </a:lnTo>
-                  <a:lnTo>
-                    <a:pt x="5873047" y="1532926"/>
-                  </a:lnTo>
-                  <a:lnTo>
-                    <a:pt x="5944669" y="1536198"/>
-                  </a:lnTo>
-                  <a:lnTo>
-                    <a:pt x="6016292" y="1539455"/>
-                  </a:lnTo>
-                  <a:lnTo>
-                    <a:pt x="6087914" y="1542697"/>
-                  </a:lnTo>
-                  <a:lnTo>
-                    <a:pt x="6159537" y="1545923"/>
-                  </a:lnTo>
-                  <a:lnTo>
-                    <a:pt x="6231159" y="1549135"/>
-                  </a:lnTo>
-                  <a:lnTo>
-                    <a:pt x="6302782" y="1552331"/>
-                  </a:lnTo>
-                  <a:lnTo>
-                    <a:pt x="6374404" y="1555512"/>
-                  </a:lnTo>
-                  <a:lnTo>
-                    <a:pt x="6446027" y="1558678"/>
-                  </a:lnTo>
-                  <a:lnTo>
-                    <a:pt x="6517649" y="1561829"/>
-                  </a:lnTo>
-                  <a:lnTo>
-                    <a:pt x="6589272" y="1564965"/>
-                  </a:lnTo>
-                  <a:lnTo>
-                    <a:pt x="6660894" y="1568087"/>
-                  </a:lnTo>
-                  <a:lnTo>
-                    <a:pt x="6732517" y="1571194"/>
-                  </a:lnTo>
-                  <a:lnTo>
-                    <a:pt x="6804139" y="1574286"/>
-                  </a:lnTo>
-                  <a:lnTo>
-                    <a:pt x="6875762" y="1577364"/>
-                  </a:lnTo>
-                  <a:lnTo>
-                    <a:pt x="6947385" y="1580427"/>
-                  </a:lnTo>
-                  <a:lnTo>
-                    <a:pt x="7019007" y="1583476"/>
-                  </a:lnTo>
-                  <a:lnTo>
-                    <a:pt x="7090630" y="1586511"/>
+                    <a:pt x="71622" y="49869"/>
+                  </a:lnTo>
+                  <a:lnTo>
+                    <a:pt x="143245" y="98635"/>
+                  </a:lnTo>
+                  <a:lnTo>
+                    <a:pt x="214867" y="146320"/>
+                  </a:lnTo>
+                  <a:lnTo>
+                    <a:pt x="286490" y="192951"/>
+                  </a:lnTo>
+                  <a:lnTo>
+                    <a:pt x="358112" y="238549"/>
+                  </a:lnTo>
+                  <a:lnTo>
+                    <a:pt x="429735" y="283137"/>
+                  </a:lnTo>
+                  <a:lnTo>
+                    <a:pt x="501357" y="326738"/>
+                  </a:lnTo>
+                  <a:lnTo>
+                    <a:pt x="572980" y="369374"/>
+                  </a:lnTo>
+                  <a:lnTo>
+                    <a:pt x="644602" y="411066"/>
+                  </a:lnTo>
+                  <a:lnTo>
+                    <a:pt x="716225" y="451835"/>
+                  </a:lnTo>
+                  <a:lnTo>
+                    <a:pt x="787847" y="491701"/>
+                  </a:lnTo>
+                  <a:lnTo>
+                    <a:pt x="859470" y="530685"/>
+                  </a:lnTo>
+                  <a:lnTo>
+                    <a:pt x="931092" y="568806"/>
+                  </a:lnTo>
+                  <a:lnTo>
+                    <a:pt x="1002715" y="606083"/>
+                  </a:lnTo>
+                  <a:lnTo>
+                    <a:pt x="1074337" y="642534"/>
+                  </a:lnTo>
+                  <a:lnTo>
+                    <a:pt x="1145960" y="678179"/>
+                  </a:lnTo>
+                  <a:lnTo>
+                    <a:pt x="1217582" y="713034"/>
+                  </a:lnTo>
+                  <a:lnTo>
+                    <a:pt x="1289205" y="747118"/>
+                  </a:lnTo>
+                  <a:lnTo>
+                    <a:pt x="1360827" y="780447"/>
+                  </a:lnTo>
+                  <a:lnTo>
+                    <a:pt x="1432450" y="813038"/>
+                  </a:lnTo>
+                  <a:lnTo>
+                    <a:pt x="1504073" y="844908"/>
+                  </a:lnTo>
+                  <a:lnTo>
+                    <a:pt x="1575695" y="876072"/>
+                  </a:lnTo>
+                  <a:lnTo>
+                    <a:pt x="1647318" y="906546"/>
+                  </a:lnTo>
+                  <a:lnTo>
+                    <a:pt x="1718940" y="936346"/>
+                  </a:lnTo>
+                  <a:lnTo>
+                    <a:pt x="1790563" y="965486"/>
+                  </a:lnTo>
+                  <a:lnTo>
+                    <a:pt x="1862185" y="993980"/>
+                  </a:lnTo>
+                  <a:lnTo>
+                    <a:pt x="1933808" y="1021844"/>
+                  </a:lnTo>
+                  <a:lnTo>
+                    <a:pt x="2005430" y="1049091"/>
+                  </a:lnTo>
+                  <a:lnTo>
+                    <a:pt x="2077053" y="1075735"/>
+                  </a:lnTo>
+                  <a:lnTo>
+                    <a:pt x="2148675" y="1101789"/>
+                  </a:lnTo>
+                  <a:lnTo>
+                    <a:pt x="2220298" y="1127266"/>
+                  </a:lnTo>
+                  <a:lnTo>
+                    <a:pt x="2291920" y="1152179"/>
+                  </a:lnTo>
+                  <a:lnTo>
+                    <a:pt x="2363543" y="1176540"/>
+                  </a:lnTo>
+                  <a:lnTo>
+                    <a:pt x="2435165" y="1200363"/>
+                  </a:lnTo>
+                  <a:lnTo>
+                    <a:pt x="2506788" y="1223657"/>
+                  </a:lnTo>
+                  <a:lnTo>
+                    <a:pt x="2578410" y="1246436"/>
+                  </a:lnTo>
+                  <a:lnTo>
+                    <a:pt x="2650033" y="1268711"/>
+                  </a:lnTo>
+                  <a:lnTo>
+                    <a:pt x="2721655" y="1290493"/>
+                  </a:lnTo>
+                  <a:lnTo>
+                    <a:pt x="2793278" y="1311792"/>
+                  </a:lnTo>
+                  <a:lnTo>
+                    <a:pt x="2864901" y="1332620"/>
+                  </a:lnTo>
+                  <a:lnTo>
+                    <a:pt x="2936523" y="1352987"/>
+                  </a:lnTo>
+                  <a:lnTo>
+                    <a:pt x="3008146" y="1372902"/>
+                  </a:lnTo>
+                  <a:lnTo>
+                    <a:pt x="3079768" y="1392377"/>
+                  </a:lnTo>
+                  <a:lnTo>
+                    <a:pt x="3151391" y="1411421"/>
+                  </a:lnTo>
+                  <a:lnTo>
+                    <a:pt x="3223013" y="1424587"/>
+                  </a:lnTo>
+                  <a:lnTo>
+                    <a:pt x="3294636" y="1428527"/>
+                  </a:lnTo>
+                  <a:lnTo>
+                    <a:pt x="3366258" y="1432449"/>
+                  </a:lnTo>
+                  <a:lnTo>
+                    <a:pt x="3437881" y="1436351"/>
+                  </a:lnTo>
+                  <a:lnTo>
+                    <a:pt x="3509503" y="1440235"/>
+                  </a:lnTo>
+                  <a:lnTo>
+                    <a:pt x="3581126" y="1444101"/>
+                  </a:lnTo>
+                  <a:lnTo>
+                    <a:pt x="3652748" y="1447948"/>
+                  </a:lnTo>
+                  <a:lnTo>
+                    <a:pt x="3724371" y="1451777"/>
+                  </a:lnTo>
+                  <a:lnTo>
+                    <a:pt x="3795993" y="1455588"/>
+                  </a:lnTo>
+                  <a:lnTo>
+                    <a:pt x="3867616" y="1459381"/>
+                  </a:lnTo>
+                  <a:lnTo>
+                    <a:pt x="3939238" y="1463155"/>
+                  </a:lnTo>
+                  <a:lnTo>
+                    <a:pt x="4010861" y="1466912"/>
+                  </a:lnTo>
+                  <a:lnTo>
+                    <a:pt x="4082483" y="1470650"/>
+                  </a:lnTo>
+                  <a:lnTo>
+                    <a:pt x="4154106" y="1474371"/>
+                  </a:lnTo>
+                  <a:lnTo>
+                    <a:pt x="4225729" y="1478074"/>
+                  </a:lnTo>
+                  <a:lnTo>
+                    <a:pt x="4297351" y="1481760"/>
+                  </a:lnTo>
+                  <a:lnTo>
+                    <a:pt x="4368974" y="1485428"/>
+                  </a:lnTo>
+                  <a:lnTo>
+                    <a:pt x="4440596" y="1489079"/>
+                  </a:lnTo>
+                  <a:lnTo>
+                    <a:pt x="4512219" y="1492712"/>
+                  </a:lnTo>
+                  <a:lnTo>
+                    <a:pt x="4583841" y="1496328"/>
+                  </a:lnTo>
+                  <a:lnTo>
+                    <a:pt x="4655464" y="1499926"/>
+                  </a:lnTo>
+                  <a:lnTo>
+                    <a:pt x="4727086" y="1503508"/>
+                  </a:lnTo>
+                  <a:lnTo>
+                    <a:pt x="4798709" y="1507073"/>
+                  </a:lnTo>
+                  <a:lnTo>
+                    <a:pt x="4870331" y="1510620"/>
+                  </a:lnTo>
+                  <a:lnTo>
+                    <a:pt x="4941954" y="1514151"/>
+                  </a:lnTo>
+                  <a:lnTo>
+                    <a:pt x="5013576" y="1517665"/>
+                  </a:lnTo>
+                  <a:lnTo>
+                    <a:pt x="5085199" y="1521162"/>
+                  </a:lnTo>
+                  <a:lnTo>
+                    <a:pt x="5156821" y="1524642"/>
+                  </a:lnTo>
+                  <a:lnTo>
+                    <a:pt x="5228444" y="1528106"/>
+                  </a:lnTo>
+                  <a:lnTo>
+                    <a:pt x="5300066" y="1531554"/>
+                  </a:lnTo>
+                  <a:lnTo>
+                    <a:pt x="5371689" y="1534985"/>
+                  </a:lnTo>
+                  <a:lnTo>
+                    <a:pt x="5443311" y="1538400"/>
+                  </a:lnTo>
+                  <a:lnTo>
+                    <a:pt x="5514934" y="1541798"/>
+                  </a:lnTo>
+                  <a:lnTo>
+                    <a:pt x="5586557" y="1545181"/>
+                  </a:lnTo>
+                  <a:lnTo>
+                    <a:pt x="5658179" y="1548547"/>
+                  </a:lnTo>
+                  <a:lnTo>
+                    <a:pt x="5729802" y="1551897"/>
+                  </a:lnTo>
+                  <a:lnTo>
+                    <a:pt x="5801424" y="1555231"/>
+                  </a:lnTo>
+                  <a:lnTo>
+                    <a:pt x="5873047" y="1558550"/>
+                  </a:lnTo>
+                  <a:lnTo>
+                    <a:pt x="5944669" y="1561852"/>
+                  </a:lnTo>
+                  <a:lnTo>
+                    <a:pt x="6016292" y="1565139"/>
+                  </a:lnTo>
+                  <a:lnTo>
+                    <a:pt x="6087914" y="1568410"/>
+                  </a:lnTo>
+                  <a:lnTo>
+                    <a:pt x="6159537" y="1571666"/>
+                  </a:lnTo>
+                  <a:lnTo>
+                    <a:pt x="6231159" y="1574906"/>
+                  </a:lnTo>
+                  <a:lnTo>
+                    <a:pt x="6302782" y="1578131"/>
+                  </a:lnTo>
+                  <a:lnTo>
+                    <a:pt x="6374404" y="1581341"/>
+                  </a:lnTo>
+                  <a:lnTo>
+                    <a:pt x="6446027" y="1584535"/>
+                  </a:lnTo>
+                  <a:lnTo>
+                    <a:pt x="6517649" y="1587714"/>
+                  </a:lnTo>
+                  <a:lnTo>
+                    <a:pt x="6589272" y="1590878"/>
+                  </a:lnTo>
+                  <a:lnTo>
+                    <a:pt x="6660894" y="1594026"/>
+                  </a:lnTo>
+                  <a:lnTo>
+                    <a:pt x="6732517" y="1597160"/>
+                  </a:lnTo>
+                  <a:lnTo>
+                    <a:pt x="6804139" y="1600279"/>
+                  </a:lnTo>
+                  <a:lnTo>
+                    <a:pt x="6875762" y="1603383"/>
+                  </a:lnTo>
+                  <a:lnTo>
+                    <a:pt x="6947385" y="1606472"/>
+                  </a:lnTo>
+                  <a:lnTo>
+                    <a:pt x="7019007" y="1609547"/>
+                  </a:lnTo>
+                  <a:lnTo>
+                    <a:pt x="7090630" y="1612607"/>
                   </a:lnTo>
                 </a:path>
               </a:pathLst>
@@ -3958,309 +3958,309 @@
           </p:nvSpPr>
           <p:spPr>
             <a:xfrm>
-              <a:off x="1172049" y="4533668"/>
-              <a:ext cx="7090630" cy="775488"/>
+              <a:off x="1172049" y="4531025"/>
+              <a:ext cx="7090630" cy="780688"/>
             </a:xfrm>
             <a:custGeom>
               <a:avLst/>
               <a:pathLst>
-                <a:path w="7090630" h="775488">
+                <a:path w="7090630" h="780688">
                   <a:moveTo>
-                    <a:pt x="7090630" y="775488"/>
+                    <a:pt x="7090630" y="780688"/>
                   </a:moveTo>
                   <a:lnTo>
-                    <a:pt x="7019007" y="769926"/>
-                  </a:lnTo>
-                  <a:lnTo>
-                    <a:pt x="6947385" y="764239"/>
-                  </a:lnTo>
-                  <a:lnTo>
-                    <a:pt x="6875762" y="758424"/>
-                  </a:lnTo>
-                  <a:lnTo>
-                    <a:pt x="6804139" y="752480"/>
-                  </a:lnTo>
-                  <a:lnTo>
-                    <a:pt x="6732517" y="746401"/>
-                  </a:lnTo>
-                  <a:lnTo>
-                    <a:pt x="6660894" y="740187"/>
-                  </a:lnTo>
-                  <a:lnTo>
-                    <a:pt x="6589272" y="733833"/>
-                  </a:lnTo>
-                  <a:lnTo>
-                    <a:pt x="6517649" y="727337"/>
-                  </a:lnTo>
-                  <a:lnTo>
-                    <a:pt x="6446027" y="720695"/>
-                  </a:lnTo>
-                  <a:lnTo>
-                    <a:pt x="6374404" y="713904"/>
-                  </a:lnTo>
-                  <a:lnTo>
-                    <a:pt x="6302782" y="706961"/>
-                  </a:lnTo>
-                  <a:lnTo>
-                    <a:pt x="6231159" y="699862"/>
-                  </a:lnTo>
-                  <a:lnTo>
-                    <a:pt x="6159537" y="692605"/>
-                  </a:lnTo>
-                  <a:lnTo>
-                    <a:pt x="6087914" y="685184"/>
-                  </a:lnTo>
-                  <a:lnTo>
-                    <a:pt x="6016292" y="677597"/>
-                  </a:lnTo>
-                  <a:lnTo>
-                    <a:pt x="5944669" y="669840"/>
-                  </a:lnTo>
-                  <a:lnTo>
-                    <a:pt x="5873047" y="661909"/>
-                  </a:lnTo>
-                  <a:lnTo>
-                    <a:pt x="5801424" y="653800"/>
-                  </a:lnTo>
-                  <a:lnTo>
-                    <a:pt x="5729802" y="645510"/>
-                  </a:lnTo>
-                  <a:lnTo>
-                    <a:pt x="5658179" y="637033"/>
-                  </a:lnTo>
-                  <a:lnTo>
-                    <a:pt x="5586557" y="628367"/>
-                  </a:lnTo>
-                  <a:lnTo>
-                    <a:pt x="5514934" y="619506"/>
-                  </a:lnTo>
-                  <a:lnTo>
-                    <a:pt x="5443311" y="610446"/>
-                  </a:lnTo>
-                  <a:lnTo>
-                    <a:pt x="5371689" y="601184"/>
-                  </a:lnTo>
-                  <a:lnTo>
-                    <a:pt x="5300066" y="591713"/>
-                  </a:lnTo>
-                  <a:lnTo>
-                    <a:pt x="5228444" y="582031"/>
-                  </a:lnTo>
-                  <a:lnTo>
-                    <a:pt x="5156821" y="572131"/>
-                  </a:lnTo>
-                  <a:lnTo>
-                    <a:pt x="5085199" y="562009"/>
-                  </a:lnTo>
-                  <a:lnTo>
-                    <a:pt x="5013576" y="551661"/>
-                  </a:lnTo>
-                  <a:lnTo>
-                    <a:pt x="4941954" y="541080"/>
-                  </a:lnTo>
-                  <a:lnTo>
-                    <a:pt x="4870331" y="530262"/>
-                  </a:lnTo>
-                  <a:lnTo>
-                    <a:pt x="4798709" y="519202"/>
-                  </a:lnTo>
-                  <a:lnTo>
-                    <a:pt x="4727086" y="507894"/>
-                  </a:lnTo>
-                  <a:lnTo>
-                    <a:pt x="4655464" y="496332"/>
-                  </a:lnTo>
-                  <a:lnTo>
-                    <a:pt x="4583841" y="484511"/>
-                  </a:lnTo>
-                  <a:lnTo>
-                    <a:pt x="4512219" y="472425"/>
-                  </a:lnTo>
-                  <a:lnTo>
-                    <a:pt x="4440596" y="460068"/>
-                  </a:lnTo>
-                  <a:lnTo>
-                    <a:pt x="4368974" y="447433"/>
-                  </a:lnTo>
-                  <a:lnTo>
-                    <a:pt x="4297351" y="434516"/>
-                  </a:lnTo>
-                  <a:lnTo>
-                    <a:pt x="4225729" y="421309"/>
-                  </a:lnTo>
-                  <a:lnTo>
-                    <a:pt x="4154106" y="407806"/>
-                  </a:lnTo>
-                  <a:lnTo>
-                    <a:pt x="4082483" y="394000"/>
-                  </a:lnTo>
-                  <a:lnTo>
-                    <a:pt x="4010861" y="379885"/>
-                  </a:lnTo>
-                  <a:lnTo>
-                    <a:pt x="3939238" y="365453"/>
-                  </a:lnTo>
-                  <a:lnTo>
-                    <a:pt x="3867616" y="350697"/>
-                  </a:lnTo>
-                  <a:lnTo>
-                    <a:pt x="3795993" y="335611"/>
-                  </a:lnTo>
-                  <a:lnTo>
-                    <a:pt x="3724371" y="320187"/>
-                  </a:lnTo>
-                  <a:lnTo>
-                    <a:pt x="3652748" y="304416"/>
-                  </a:lnTo>
-                  <a:lnTo>
-                    <a:pt x="3581126" y="288292"/>
-                  </a:lnTo>
-                  <a:lnTo>
-                    <a:pt x="3509503" y="271807"/>
-                  </a:lnTo>
-                  <a:lnTo>
-                    <a:pt x="3437881" y="254952"/>
-                  </a:lnTo>
-                  <a:lnTo>
-                    <a:pt x="3366258" y="237719"/>
-                  </a:lnTo>
-                  <a:lnTo>
-                    <a:pt x="3294636" y="220100"/>
-                  </a:lnTo>
-                  <a:lnTo>
-                    <a:pt x="3223013" y="202085"/>
-                  </a:lnTo>
-                  <a:lnTo>
-                    <a:pt x="3151391" y="191905"/>
-                  </a:lnTo>
-                  <a:lnTo>
-                    <a:pt x="3079768" y="187971"/>
-                  </a:lnTo>
-                  <a:lnTo>
-                    <a:pt x="3008146" y="184019"/>
-                  </a:lnTo>
-                  <a:lnTo>
-                    <a:pt x="2936523" y="180048"/>
-                  </a:lnTo>
-                  <a:lnTo>
-                    <a:pt x="2864901" y="176058"/>
-                  </a:lnTo>
-                  <a:lnTo>
-                    <a:pt x="2793278" y="172049"/>
-                  </a:lnTo>
-                  <a:lnTo>
-                    <a:pt x="2721655" y="168022"/>
-                  </a:lnTo>
-                  <a:lnTo>
-                    <a:pt x="2650033" y="163975"/>
-                  </a:lnTo>
-                  <a:lnTo>
-                    <a:pt x="2578410" y="159910"/>
-                  </a:lnTo>
-                  <a:lnTo>
-                    <a:pt x="2506788" y="155825"/>
-                  </a:lnTo>
-                  <a:lnTo>
-                    <a:pt x="2435165" y="151720"/>
-                  </a:lnTo>
-                  <a:lnTo>
-                    <a:pt x="2363543" y="147597"/>
-                  </a:lnTo>
-                  <a:lnTo>
-                    <a:pt x="2291920" y="143453"/>
-                  </a:lnTo>
-                  <a:lnTo>
-                    <a:pt x="2220298" y="139291"/>
-                  </a:lnTo>
-                  <a:lnTo>
-                    <a:pt x="2148675" y="135108"/>
-                  </a:lnTo>
-                  <a:lnTo>
-                    <a:pt x="2077053" y="130906"/>
-                  </a:lnTo>
-                  <a:lnTo>
-                    <a:pt x="2005430" y="126684"/>
-                  </a:lnTo>
-                  <a:lnTo>
-                    <a:pt x="1933808" y="122441"/>
-                  </a:lnTo>
-                  <a:lnTo>
-                    <a:pt x="1862185" y="118179"/>
-                  </a:lnTo>
-                  <a:lnTo>
-                    <a:pt x="1790563" y="113897"/>
-                  </a:lnTo>
-                  <a:lnTo>
-                    <a:pt x="1718940" y="109594"/>
-                  </a:lnTo>
-                  <a:lnTo>
-                    <a:pt x="1647318" y="105271"/>
-                  </a:lnTo>
-                  <a:lnTo>
-                    <a:pt x="1575695" y="100928"/>
-                  </a:lnTo>
-                  <a:lnTo>
-                    <a:pt x="1504073" y="96564"/>
-                  </a:lnTo>
-                  <a:lnTo>
-                    <a:pt x="1432450" y="92179"/>
-                  </a:lnTo>
-                  <a:lnTo>
-                    <a:pt x="1360827" y="87774"/>
-                  </a:lnTo>
-                  <a:lnTo>
-                    <a:pt x="1289205" y="83348"/>
-                  </a:lnTo>
-                  <a:lnTo>
-                    <a:pt x="1217582" y="78901"/>
-                  </a:lnTo>
-                  <a:lnTo>
-                    <a:pt x="1145960" y="74433"/>
-                  </a:lnTo>
-                  <a:lnTo>
-                    <a:pt x="1074337" y="69943"/>
-                  </a:lnTo>
-                  <a:lnTo>
-                    <a:pt x="1002715" y="65433"/>
-                  </a:lnTo>
-                  <a:lnTo>
-                    <a:pt x="931092" y="60901"/>
-                  </a:lnTo>
-                  <a:lnTo>
-                    <a:pt x="859470" y="56348"/>
-                  </a:lnTo>
-                  <a:lnTo>
-                    <a:pt x="787847" y="51773"/>
-                  </a:lnTo>
-                  <a:lnTo>
-                    <a:pt x="716225" y="47177"/>
-                  </a:lnTo>
-                  <a:lnTo>
-                    <a:pt x="644602" y="42559"/>
-                  </a:lnTo>
-                  <a:lnTo>
-                    <a:pt x="572980" y="37918"/>
-                  </a:lnTo>
-                  <a:lnTo>
-                    <a:pt x="501357" y="33257"/>
-                  </a:lnTo>
-                  <a:lnTo>
-                    <a:pt x="429735" y="28573"/>
-                  </a:lnTo>
-                  <a:lnTo>
-                    <a:pt x="358112" y="23866"/>
-                  </a:lnTo>
-                  <a:lnTo>
-                    <a:pt x="286490" y="19138"/>
-                  </a:lnTo>
-                  <a:lnTo>
-                    <a:pt x="214867" y="14387"/>
-                  </a:lnTo>
-                  <a:lnTo>
-                    <a:pt x="143245" y="9614"/>
-                  </a:lnTo>
-                  <a:lnTo>
-                    <a:pt x="71622" y="4818"/>
+                    <a:pt x="7019007" y="775130"/>
+                  </a:lnTo>
+                  <a:lnTo>
+                    <a:pt x="6947385" y="769445"/>
+                  </a:lnTo>
+                  <a:lnTo>
+                    <a:pt x="6875762" y="763631"/>
+                  </a:lnTo>
+                  <a:lnTo>
+                    <a:pt x="6804139" y="757686"/>
+                  </a:lnTo>
+                  <a:lnTo>
+                    <a:pt x="6732517" y="751606"/>
+                  </a:lnTo>
+                  <a:lnTo>
+                    <a:pt x="6660894" y="745389"/>
+                  </a:lnTo>
+                  <a:lnTo>
+                    <a:pt x="6589272" y="739031"/>
+                  </a:lnTo>
+                  <a:lnTo>
+                    <a:pt x="6517649" y="732529"/>
+                  </a:lnTo>
+                  <a:lnTo>
+                    <a:pt x="6446027" y="725879"/>
+                  </a:lnTo>
+                  <a:lnTo>
+                    <a:pt x="6374404" y="719079"/>
+                  </a:lnTo>
+                  <a:lnTo>
+                    <a:pt x="6302782" y="712126"/>
+                  </a:lnTo>
+                  <a:lnTo>
+                    <a:pt x="6231159" y="705014"/>
+                  </a:lnTo>
+                  <a:lnTo>
+                    <a:pt x="6159537" y="697742"/>
+                  </a:lnTo>
+                  <a:lnTo>
+                    <a:pt x="6087914" y="690305"/>
+                  </a:lnTo>
+                  <a:lnTo>
+                    <a:pt x="6016292" y="682700"/>
+                  </a:lnTo>
+                  <a:lnTo>
+                    <a:pt x="5944669" y="674922"/>
+                  </a:lnTo>
+                  <a:lnTo>
+                    <a:pt x="5873047" y="666969"/>
+                  </a:lnTo>
+                  <a:lnTo>
+                    <a:pt x="5801424" y="658835"/>
+                  </a:lnTo>
+                  <a:lnTo>
+                    <a:pt x="5729802" y="650518"/>
+                  </a:lnTo>
+                  <a:lnTo>
+                    <a:pt x="5658179" y="642011"/>
+                  </a:lnTo>
+                  <a:lnTo>
+                    <a:pt x="5586557" y="633313"/>
+                  </a:lnTo>
+                  <a:lnTo>
+                    <a:pt x="5514934" y="624417"/>
+                  </a:lnTo>
+                  <a:lnTo>
+                    <a:pt x="5443311" y="615320"/>
+                  </a:lnTo>
+                  <a:lnTo>
+                    <a:pt x="5371689" y="606017"/>
+                  </a:lnTo>
+                  <a:lnTo>
+                    <a:pt x="5300066" y="596504"/>
+                  </a:lnTo>
+                  <a:lnTo>
+                    <a:pt x="5228444" y="586775"/>
+                  </a:lnTo>
+                  <a:lnTo>
+                    <a:pt x="5156821" y="576826"/>
+                  </a:lnTo>
+                  <a:lnTo>
+                    <a:pt x="5085199" y="566651"/>
+                  </a:lnTo>
+                  <a:lnTo>
+                    <a:pt x="5013576" y="556246"/>
+                  </a:lnTo>
+                  <a:lnTo>
+                    <a:pt x="4941954" y="545606"/>
+                  </a:lnTo>
+                  <a:lnTo>
+                    <a:pt x="4870331" y="534725"/>
+                  </a:lnTo>
+                  <a:lnTo>
+                    <a:pt x="4798709" y="523597"/>
+                  </a:lnTo>
+                  <a:lnTo>
+                    <a:pt x="4727086" y="512217"/>
+                  </a:lnTo>
+                  <a:lnTo>
+                    <a:pt x="4655464" y="500580"/>
+                  </a:lnTo>
+                  <a:lnTo>
+                    <a:pt x="4583841" y="488679"/>
+                  </a:lnTo>
+                  <a:lnTo>
+                    <a:pt x="4512219" y="476509"/>
+                  </a:lnTo>
+                  <a:lnTo>
+                    <a:pt x="4440596" y="464064"/>
+                  </a:lnTo>
+                  <a:lnTo>
+                    <a:pt x="4368974" y="451336"/>
+                  </a:lnTo>
+                  <a:lnTo>
+                    <a:pt x="4297351" y="438321"/>
+                  </a:lnTo>
+                  <a:lnTo>
+                    <a:pt x="4225729" y="425010"/>
+                  </a:lnTo>
+                  <a:lnTo>
+                    <a:pt x="4154106" y="411399"/>
+                  </a:lnTo>
+                  <a:lnTo>
+                    <a:pt x="4082483" y="397479"/>
+                  </a:lnTo>
+                  <a:lnTo>
+                    <a:pt x="4010861" y="383244"/>
+                  </a:lnTo>
+                  <a:lnTo>
+                    <a:pt x="3939238" y="368687"/>
+                  </a:lnTo>
+                  <a:lnTo>
+                    <a:pt x="3867616" y="353800"/>
+                  </a:lnTo>
+                  <a:lnTo>
+                    <a:pt x="3795993" y="338576"/>
+                  </a:lnTo>
+                  <a:lnTo>
+                    <a:pt x="3724371" y="323008"/>
+                  </a:lnTo>
+                  <a:lnTo>
+                    <a:pt x="3652748" y="307087"/>
+                  </a:lnTo>
+                  <a:lnTo>
+                    <a:pt x="3581126" y="290806"/>
+                  </a:lnTo>
+                  <a:lnTo>
+                    <a:pt x="3509503" y="274155"/>
+                  </a:lnTo>
+                  <a:lnTo>
+                    <a:pt x="3437881" y="257128"/>
+                  </a:lnTo>
+                  <a:lnTo>
+                    <a:pt x="3366258" y="239716"/>
+                  </a:lnTo>
+                  <a:lnTo>
+                    <a:pt x="3294636" y="221909"/>
+                  </a:lnTo>
+                  <a:lnTo>
+                    <a:pt x="3223013" y="203699"/>
+                  </a:lnTo>
+                  <a:lnTo>
+                    <a:pt x="3151391" y="194285"/>
+                  </a:lnTo>
+                  <a:lnTo>
+                    <a:pt x="3079768" y="190307"/>
+                  </a:lnTo>
+                  <a:lnTo>
+                    <a:pt x="3008146" y="186310"/>
+                  </a:lnTo>
+                  <a:lnTo>
+                    <a:pt x="2936523" y="182294"/>
+                  </a:lnTo>
+                  <a:lnTo>
+                    <a:pt x="2864901" y="178259"/>
+                  </a:lnTo>
+                  <a:lnTo>
+                    <a:pt x="2793278" y="174204"/>
+                  </a:lnTo>
+                  <a:lnTo>
+                    <a:pt x="2721655" y="170130"/>
+                  </a:lnTo>
+                  <a:lnTo>
+                    <a:pt x="2650033" y="166037"/>
+                  </a:lnTo>
+                  <a:lnTo>
+                    <a:pt x="2578410" y="161924"/>
+                  </a:lnTo>
+                  <a:lnTo>
+                    <a:pt x="2506788" y="157791"/>
+                  </a:lnTo>
+                  <a:lnTo>
+                    <a:pt x="2435165" y="153639"/>
+                  </a:lnTo>
+                  <a:lnTo>
+                    <a:pt x="2363543" y="149467"/>
+                  </a:lnTo>
+                  <a:lnTo>
+                    <a:pt x="2291920" y="145275"/>
+                  </a:lnTo>
+                  <a:lnTo>
+                    <a:pt x="2220298" y="141062"/>
+                  </a:lnTo>
+                  <a:lnTo>
+                    <a:pt x="2148675" y="136830"/>
+                  </a:lnTo>
+                  <a:lnTo>
+                    <a:pt x="2077053" y="132577"/>
+                  </a:lnTo>
+                  <a:lnTo>
+                    <a:pt x="2005430" y="128304"/>
+                  </a:lnTo>
+                  <a:lnTo>
+                    <a:pt x="1933808" y="124011"/>
+                  </a:lnTo>
+                  <a:lnTo>
+                    <a:pt x="1862185" y="119697"/>
+                  </a:lnTo>
+                  <a:lnTo>
+                    <a:pt x="1790563" y="115363"/>
+                  </a:lnTo>
+                  <a:lnTo>
+                    <a:pt x="1718940" y="111008"/>
+                  </a:lnTo>
+                  <a:lnTo>
+                    <a:pt x="1647318" y="106631"/>
+                  </a:lnTo>
+                  <a:lnTo>
+                    <a:pt x="1575695" y="102234"/>
+                  </a:lnTo>
+                  <a:lnTo>
+                    <a:pt x="1504073" y="97816"/>
+                  </a:lnTo>
+                  <a:lnTo>
+                    <a:pt x="1432450" y="93377"/>
+                  </a:lnTo>
+                  <a:lnTo>
+                    <a:pt x="1360827" y="88917"/>
+                  </a:lnTo>
+                  <a:lnTo>
+                    <a:pt x="1289205" y="84435"/>
+                  </a:lnTo>
+                  <a:lnTo>
+                    <a:pt x="1217582" y="79932"/>
+                  </a:lnTo>
+                  <a:lnTo>
+                    <a:pt x="1145960" y="75408"/>
+                  </a:lnTo>
+                  <a:lnTo>
+                    <a:pt x="1074337" y="70861"/>
+                  </a:lnTo>
+                  <a:lnTo>
+                    <a:pt x="1002715" y="66293"/>
+                  </a:lnTo>
+                  <a:lnTo>
+                    <a:pt x="931092" y="61703"/>
+                  </a:lnTo>
+                  <a:lnTo>
+                    <a:pt x="859470" y="57092"/>
+                  </a:lnTo>
+                  <a:lnTo>
+                    <a:pt x="787847" y="52458"/>
+                  </a:lnTo>
+                  <a:lnTo>
+                    <a:pt x="716225" y="47802"/>
+                  </a:lnTo>
+                  <a:lnTo>
+                    <a:pt x="644602" y="43123"/>
+                  </a:lnTo>
+                  <a:lnTo>
+                    <a:pt x="572980" y="38423"/>
+                  </a:lnTo>
+                  <a:lnTo>
+                    <a:pt x="501357" y="33700"/>
+                  </a:lnTo>
+                  <a:lnTo>
+                    <a:pt x="429735" y="28954"/>
+                  </a:lnTo>
+                  <a:lnTo>
+                    <a:pt x="358112" y="24186"/>
+                  </a:lnTo>
+                  <a:lnTo>
+                    <a:pt x="286490" y="19394"/>
+                  </a:lnTo>
+                  <a:lnTo>
+                    <a:pt x="214867" y="14580"/>
+                  </a:lnTo>
+                  <a:lnTo>
+                    <a:pt x="143245" y="9743"/>
+                  </a:lnTo>
+                  <a:lnTo>
+                    <a:pt x="71622" y="4883"/>
                   </a:lnTo>
                   <a:lnTo>
                     <a:pt x="0" y="0"/>
@@ -4283,312 +4283,312 @@
           </p:nvSpPr>
           <p:spPr>
             <a:xfrm>
-              <a:off x="1172049" y="4047076"/>
-              <a:ext cx="7090630" cy="1111213"/>
+              <a:off x="1172049" y="4036842"/>
+              <a:ext cx="7090630" cy="1124007"/>
             </a:xfrm>
             <a:custGeom>
               <a:avLst/>
               <a:pathLst>
-                <a:path w="7090630" h="1111213">
+                <a:path w="7090630" h="1124007">
                   <a:moveTo>
                     <a:pt x="0" y="0"/>
                   </a:moveTo>
                   <a:lnTo>
-                    <a:pt x="71622" y="20169"/>
-                  </a:lnTo>
-                  <a:lnTo>
-                    <a:pt x="143245" y="40069"/>
-                  </a:lnTo>
-                  <a:lnTo>
-                    <a:pt x="214867" y="59703"/>
-                  </a:lnTo>
-                  <a:lnTo>
-                    <a:pt x="286490" y="79075"/>
-                  </a:lnTo>
-                  <a:lnTo>
-                    <a:pt x="358112" y="98188"/>
-                  </a:lnTo>
-                  <a:lnTo>
-                    <a:pt x="429735" y="117046"/>
-                  </a:lnTo>
-                  <a:lnTo>
-                    <a:pt x="501357" y="135652"/>
-                  </a:lnTo>
-                  <a:lnTo>
-                    <a:pt x="572980" y="154010"/>
-                  </a:lnTo>
-                  <a:lnTo>
-                    <a:pt x="644602" y="172122"/>
-                  </a:lnTo>
-                  <a:lnTo>
-                    <a:pt x="716225" y="189993"/>
-                  </a:lnTo>
-                  <a:lnTo>
-                    <a:pt x="787847" y="207625"/>
-                  </a:lnTo>
-                  <a:lnTo>
-                    <a:pt x="859470" y="225021"/>
-                  </a:lnTo>
-                  <a:lnTo>
-                    <a:pt x="931092" y="242185"/>
-                  </a:lnTo>
-                  <a:lnTo>
-                    <a:pt x="1002715" y="259120"/>
-                  </a:lnTo>
-                  <a:lnTo>
-                    <a:pt x="1074337" y="275829"/>
-                  </a:lnTo>
-                  <a:lnTo>
-                    <a:pt x="1145960" y="292314"/>
-                  </a:lnTo>
-                  <a:lnTo>
-                    <a:pt x="1217582" y="308579"/>
-                  </a:lnTo>
-                  <a:lnTo>
-                    <a:pt x="1289205" y="324627"/>
-                  </a:lnTo>
-                  <a:lnTo>
-                    <a:pt x="1360827" y="340461"/>
-                  </a:lnTo>
-                  <a:lnTo>
-                    <a:pt x="1432450" y="356083"/>
-                  </a:lnTo>
-                  <a:lnTo>
-                    <a:pt x="1504073" y="371497"/>
-                  </a:lnTo>
-                  <a:lnTo>
-                    <a:pt x="1575695" y="386705"/>
-                  </a:lnTo>
-                  <a:lnTo>
-                    <a:pt x="1647318" y="401710"/>
-                  </a:lnTo>
-                  <a:lnTo>
-                    <a:pt x="1718940" y="416514"/>
-                  </a:lnTo>
-                  <a:lnTo>
-                    <a:pt x="1790563" y="431120"/>
-                  </a:lnTo>
-                  <a:lnTo>
-                    <a:pt x="1862185" y="445532"/>
-                  </a:lnTo>
-                  <a:lnTo>
-                    <a:pt x="1933808" y="459751"/>
-                  </a:lnTo>
-                  <a:lnTo>
-                    <a:pt x="2005430" y="473780"/>
-                  </a:lnTo>
-                  <a:lnTo>
-                    <a:pt x="2077053" y="487622"/>
-                  </a:lnTo>
-                  <a:lnTo>
-                    <a:pt x="2148675" y="501278"/>
-                  </a:lnTo>
-                  <a:lnTo>
-                    <a:pt x="2220298" y="514753"/>
-                  </a:lnTo>
-                  <a:lnTo>
-                    <a:pt x="2291920" y="528047"/>
-                  </a:lnTo>
-                  <a:lnTo>
-                    <a:pt x="2363543" y="541164"/>
-                  </a:lnTo>
-                  <a:lnTo>
-                    <a:pt x="2435165" y="554106"/>
-                  </a:lnTo>
-                  <a:lnTo>
-                    <a:pt x="2506788" y="566875"/>
-                  </a:lnTo>
-                  <a:lnTo>
-                    <a:pt x="2578410" y="579473"/>
-                  </a:lnTo>
-                  <a:lnTo>
-                    <a:pt x="2650033" y="591903"/>
-                  </a:lnTo>
-                  <a:lnTo>
-                    <a:pt x="2721655" y="604167"/>
-                  </a:lnTo>
-                  <a:lnTo>
-                    <a:pt x="2793278" y="616268"/>
-                  </a:lnTo>
-                  <a:lnTo>
-                    <a:pt x="2864901" y="628206"/>
-                  </a:lnTo>
-                  <a:lnTo>
-                    <a:pt x="2936523" y="639986"/>
-                  </a:lnTo>
-                  <a:lnTo>
-                    <a:pt x="3008146" y="651608"/>
-                  </a:lnTo>
-                  <a:lnTo>
-                    <a:pt x="3079768" y="663074"/>
-                  </a:lnTo>
-                  <a:lnTo>
-                    <a:pt x="3151391" y="674388"/>
-                  </a:lnTo>
-                  <a:lnTo>
-                    <a:pt x="3223013" y="685550"/>
-                  </a:lnTo>
-                  <a:lnTo>
-                    <a:pt x="3294636" y="696564"/>
-                  </a:lnTo>
-                  <a:lnTo>
-                    <a:pt x="3366258" y="707430"/>
-                  </a:lnTo>
-                  <a:lnTo>
-                    <a:pt x="3437881" y="718151"/>
-                  </a:lnTo>
-                  <a:lnTo>
-                    <a:pt x="3509503" y="728729"/>
-                  </a:lnTo>
-                  <a:lnTo>
-                    <a:pt x="3581126" y="739166"/>
-                  </a:lnTo>
-                  <a:lnTo>
-                    <a:pt x="3652748" y="749463"/>
-                  </a:lnTo>
-                  <a:lnTo>
-                    <a:pt x="3724371" y="759623"/>
-                  </a:lnTo>
-                  <a:lnTo>
-                    <a:pt x="3795993" y="769647"/>
-                  </a:lnTo>
-                  <a:lnTo>
-                    <a:pt x="3867616" y="779537"/>
-                  </a:lnTo>
-                  <a:lnTo>
-                    <a:pt x="3939238" y="789295"/>
-                  </a:lnTo>
-                  <a:lnTo>
-                    <a:pt x="4010861" y="798923"/>
-                  </a:lnTo>
-                  <a:lnTo>
-                    <a:pt x="4082483" y="808422"/>
-                  </a:lnTo>
-                  <a:lnTo>
-                    <a:pt x="4154106" y="817795"/>
-                  </a:lnTo>
-                  <a:lnTo>
-                    <a:pt x="4225729" y="827042"/>
-                  </a:lnTo>
-                  <a:lnTo>
-                    <a:pt x="4297351" y="836165"/>
-                  </a:lnTo>
-                  <a:lnTo>
-                    <a:pt x="4368974" y="845167"/>
-                  </a:lnTo>
-                  <a:lnTo>
-                    <a:pt x="4440596" y="854049"/>
-                  </a:lnTo>
-                  <a:lnTo>
-                    <a:pt x="4512219" y="862812"/>
-                  </a:lnTo>
-                  <a:lnTo>
-                    <a:pt x="4583841" y="871458"/>
-                  </a:lnTo>
-                  <a:lnTo>
-                    <a:pt x="4655464" y="879988"/>
-                  </a:lnTo>
-                  <a:lnTo>
-                    <a:pt x="4727086" y="888405"/>
-                  </a:lnTo>
-                  <a:lnTo>
-                    <a:pt x="4798709" y="896709"/>
-                  </a:lnTo>
-                  <a:lnTo>
-                    <a:pt x="4870331" y="904902"/>
-                  </a:lnTo>
-                  <a:lnTo>
-                    <a:pt x="4941954" y="912986"/>
-                  </a:lnTo>
-                  <a:lnTo>
-                    <a:pt x="5013576" y="920962"/>
-                  </a:lnTo>
-                  <a:lnTo>
-                    <a:pt x="5085199" y="928831"/>
-                  </a:lnTo>
-                  <a:lnTo>
-                    <a:pt x="5156821" y="936595"/>
-                  </a:lnTo>
-                  <a:lnTo>
-                    <a:pt x="5228444" y="944256"/>
-                  </a:lnTo>
-                  <a:lnTo>
-                    <a:pt x="5300066" y="951814"/>
-                  </a:lnTo>
-                  <a:lnTo>
-                    <a:pt x="5371689" y="959271"/>
-                  </a:lnTo>
-                  <a:lnTo>
-                    <a:pt x="5443311" y="966629"/>
-                  </a:lnTo>
-                  <a:lnTo>
-                    <a:pt x="5514934" y="973888"/>
-                  </a:lnTo>
-                  <a:lnTo>
-                    <a:pt x="5586557" y="981051"/>
-                  </a:lnTo>
-                  <a:lnTo>
-                    <a:pt x="5658179" y="988117"/>
-                  </a:lnTo>
-                  <a:lnTo>
-                    <a:pt x="5729802" y="995090"/>
-                  </a:lnTo>
-                  <a:lnTo>
-                    <a:pt x="5801424" y="1001969"/>
-                  </a:lnTo>
-                  <a:lnTo>
-                    <a:pt x="5873047" y="1008756"/>
-                  </a:lnTo>
-                  <a:lnTo>
-                    <a:pt x="5944669" y="1015453"/>
-                  </a:lnTo>
-                  <a:lnTo>
-                    <a:pt x="6016292" y="1022060"/>
-                  </a:lnTo>
-                  <a:lnTo>
-                    <a:pt x="6087914" y="1028579"/>
-                  </a:lnTo>
-                  <a:lnTo>
-                    <a:pt x="6159537" y="1035011"/>
-                  </a:lnTo>
-                  <a:lnTo>
-                    <a:pt x="6231159" y="1041358"/>
-                  </a:lnTo>
-                  <a:lnTo>
-                    <a:pt x="6302782" y="1047619"/>
-                  </a:lnTo>
-                  <a:lnTo>
-                    <a:pt x="6374404" y="1053797"/>
-                  </a:lnTo>
-                  <a:lnTo>
-                    <a:pt x="6446027" y="1059892"/>
-                  </a:lnTo>
-                  <a:lnTo>
-                    <a:pt x="6517649" y="1065906"/>
-                  </a:lnTo>
-                  <a:lnTo>
-                    <a:pt x="6589272" y="1071839"/>
-                  </a:lnTo>
-                  <a:lnTo>
-                    <a:pt x="6660894" y="1077693"/>
-                  </a:lnTo>
-                  <a:lnTo>
-                    <a:pt x="6732517" y="1083469"/>
-                  </a:lnTo>
-                  <a:lnTo>
-                    <a:pt x="6804139" y="1089168"/>
-                  </a:lnTo>
-                  <a:lnTo>
-                    <a:pt x="6875762" y="1094791"/>
-                  </a:lnTo>
-                  <a:lnTo>
-                    <a:pt x="6947385" y="1100339"/>
-                  </a:lnTo>
-                  <a:lnTo>
-                    <a:pt x="7019007" y="1105812"/>
-                  </a:lnTo>
-                  <a:lnTo>
-                    <a:pt x="7090630" y="1111213"/>
+                    <a:pt x="71622" y="20505"/>
+                  </a:lnTo>
+                  <a:lnTo>
+                    <a:pt x="143245" y="40735"/>
+                  </a:lnTo>
+                  <a:lnTo>
+                    <a:pt x="214867" y="60691"/>
+                  </a:lnTo>
+                  <a:lnTo>
+                    <a:pt x="286490" y="80379"/>
+                  </a:lnTo>
+                  <a:lnTo>
+                    <a:pt x="358112" y="99800"/>
+                  </a:lnTo>
+                  <a:lnTo>
+                    <a:pt x="429735" y="118960"/>
+                  </a:lnTo>
+                  <a:lnTo>
+                    <a:pt x="501357" y="137862"/>
+                  </a:lnTo>
+                  <a:lnTo>
+                    <a:pt x="572980" y="156508"/>
+                  </a:lnTo>
+                  <a:lnTo>
+                    <a:pt x="644602" y="174903"/>
+                  </a:lnTo>
+                  <a:lnTo>
+                    <a:pt x="716225" y="193050"/>
+                  </a:lnTo>
+                  <a:lnTo>
+                    <a:pt x="787847" y="210953"/>
+                  </a:lnTo>
+                  <a:lnTo>
+                    <a:pt x="859470" y="228613"/>
+                  </a:lnTo>
+                  <a:lnTo>
+                    <a:pt x="931092" y="246036"/>
+                  </a:lnTo>
+                  <a:lnTo>
+                    <a:pt x="1002715" y="263224"/>
+                  </a:lnTo>
+                  <a:lnTo>
+                    <a:pt x="1074337" y="280179"/>
+                  </a:lnTo>
+                  <a:lnTo>
+                    <a:pt x="1145960" y="296906"/>
+                  </a:lnTo>
+                  <a:lnTo>
+                    <a:pt x="1217582" y="313408"/>
+                  </a:lnTo>
+                  <a:lnTo>
+                    <a:pt x="1289205" y="329687"/>
+                  </a:lnTo>
+                  <a:lnTo>
+                    <a:pt x="1360827" y="345746"/>
+                  </a:lnTo>
+                  <a:lnTo>
+                    <a:pt x="1432450" y="361589"/>
+                  </a:lnTo>
+                  <a:lnTo>
+                    <a:pt x="1504073" y="377218"/>
+                  </a:lnTo>
+                  <a:lnTo>
+                    <a:pt x="1575695" y="392636"/>
+                  </a:lnTo>
+                  <a:lnTo>
+                    <a:pt x="1647318" y="407847"/>
+                  </a:lnTo>
+                  <a:lnTo>
+                    <a:pt x="1718940" y="422852"/>
+                  </a:lnTo>
+                  <a:lnTo>
+                    <a:pt x="1790563" y="437655"/>
+                  </a:lnTo>
+                  <a:lnTo>
+                    <a:pt x="1862185" y="452258"/>
+                  </a:lnTo>
+                  <a:lnTo>
+                    <a:pt x="1933808" y="466664"/>
+                  </a:lnTo>
+                  <a:lnTo>
+                    <a:pt x="2005430" y="480876"/>
+                  </a:lnTo>
+                  <a:lnTo>
+                    <a:pt x="2077053" y="494897"/>
+                  </a:lnTo>
+                  <a:lnTo>
+                    <a:pt x="2148675" y="508728"/>
+                  </a:lnTo>
+                  <a:lnTo>
+                    <a:pt x="2220298" y="522372"/>
+                  </a:lnTo>
+                  <a:lnTo>
+                    <a:pt x="2291920" y="535833"/>
+                  </a:lnTo>
+                  <a:lnTo>
+                    <a:pt x="2363543" y="549112"/>
+                  </a:lnTo>
+                  <a:lnTo>
+                    <a:pt x="2435165" y="562212"/>
+                  </a:lnTo>
+                  <a:lnTo>
+                    <a:pt x="2506788" y="575135"/>
+                  </a:lnTo>
+                  <a:lnTo>
+                    <a:pt x="2578410" y="587884"/>
+                  </a:lnTo>
+                  <a:lnTo>
+                    <a:pt x="2650033" y="600461"/>
+                  </a:lnTo>
+                  <a:lnTo>
+                    <a:pt x="2721655" y="612869"/>
+                  </a:lnTo>
+                  <a:lnTo>
+                    <a:pt x="2793278" y="625109"/>
+                  </a:lnTo>
+                  <a:lnTo>
+                    <a:pt x="2864901" y="637184"/>
+                  </a:lnTo>
+                  <a:lnTo>
+                    <a:pt x="2936523" y="649096"/>
+                  </a:lnTo>
+                  <a:lnTo>
+                    <a:pt x="3008146" y="660848"/>
+                  </a:lnTo>
+                  <a:lnTo>
+                    <a:pt x="3079768" y="672440"/>
+                  </a:lnTo>
+                  <a:lnTo>
+                    <a:pt x="3151391" y="683877"/>
+                  </a:lnTo>
+                  <a:lnTo>
+                    <a:pt x="3223013" y="695159"/>
+                  </a:lnTo>
+                  <a:lnTo>
+                    <a:pt x="3294636" y="706290"/>
+                  </a:lnTo>
+                  <a:lnTo>
+                    <a:pt x="3366258" y="717270"/>
+                  </a:lnTo>
+                  <a:lnTo>
+                    <a:pt x="3437881" y="728102"/>
+                  </a:lnTo>
+                  <a:lnTo>
+                    <a:pt x="3509503" y="738788"/>
+                  </a:lnTo>
+                  <a:lnTo>
+                    <a:pt x="3581126" y="749330"/>
+                  </a:lnTo>
+                  <a:lnTo>
+                    <a:pt x="3652748" y="759729"/>
+                  </a:lnTo>
+                  <a:lnTo>
+                    <a:pt x="3724371" y="769988"/>
+                  </a:lnTo>
+                  <a:lnTo>
+                    <a:pt x="3795993" y="780109"/>
+                  </a:lnTo>
+                  <a:lnTo>
+                    <a:pt x="3867616" y="790094"/>
+                  </a:lnTo>
+                  <a:lnTo>
+                    <a:pt x="3939238" y="799944"/>
+                  </a:lnTo>
+                  <a:lnTo>
+                    <a:pt x="4010861" y="809661"/>
+                  </a:lnTo>
+                  <a:lnTo>
+                    <a:pt x="4082483" y="819247"/>
+                  </a:lnTo>
+                  <a:lnTo>
+                    <a:pt x="4154106" y="828703"/>
+                  </a:lnTo>
+                  <a:lnTo>
+                    <a:pt x="4225729" y="838032"/>
+                  </a:lnTo>
+                  <a:lnTo>
+                    <a:pt x="4297351" y="847236"/>
+                  </a:lnTo>
+                  <a:lnTo>
+                    <a:pt x="4368974" y="856315"/>
+                  </a:lnTo>
+                  <a:lnTo>
+                    <a:pt x="4440596" y="865271"/>
+                  </a:lnTo>
+                  <a:lnTo>
+                    <a:pt x="4512219" y="874107"/>
+                  </a:lnTo>
+                  <a:lnTo>
+                    <a:pt x="4583841" y="882824"/>
+                  </a:lnTo>
+                  <a:lnTo>
+                    <a:pt x="4655464" y="891423"/>
+                  </a:lnTo>
+                  <a:lnTo>
+                    <a:pt x="4727086" y="899906"/>
+                  </a:lnTo>
+                  <a:lnTo>
+                    <a:pt x="4798709" y="908275"/>
+                  </a:lnTo>
+                  <a:lnTo>
+                    <a:pt x="4870331" y="916531"/>
+                  </a:lnTo>
+                  <a:lnTo>
+                    <a:pt x="4941954" y="924676"/>
+                  </a:lnTo>
+                  <a:lnTo>
+                    <a:pt x="5013576" y="932710"/>
+                  </a:lnTo>
+                  <a:lnTo>
+                    <a:pt x="5085199" y="940637"/>
+                  </a:lnTo>
+                  <a:lnTo>
+                    <a:pt x="5156821" y="948456"/>
+                  </a:lnTo>
+                  <a:lnTo>
+                    <a:pt x="5228444" y="956170"/>
+                  </a:lnTo>
+                  <a:lnTo>
+                    <a:pt x="5300066" y="963780"/>
+                  </a:lnTo>
+                  <a:lnTo>
+                    <a:pt x="5371689" y="971287"/>
+                  </a:lnTo>
+                  <a:lnTo>
+                    <a:pt x="5443311" y="978693"/>
+                  </a:lnTo>
+                  <a:lnTo>
+                    <a:pt x="5514934" y="985999"/>
+                  </a:lnTo>
+                  <a:lnTo>
+                    <a:pt x="5586557" y="993207"/>
+                  </a:lnTo>
+                  <a:lnTo>
+                    <a:pt x="5658179" y="1000318"/>
+                  </a:lnTo>
+                  <a:lnTo>
+                    <a:pt x="5729802" y="1007332"/>
+                  </a:lnTo>
+                  <a:lnTo>
+                    <a:pt x="5801424" y="1014252"/>
+                  </a:lnTo>
+                  <a:lnTo>
+                    <a:pt x="5873047" y="1021079"/>
+                  </a:lnTo>
+                  <a:lnTo>
+                    <a:pt x="5944669" y="1027813"/>
+                  </a:lnTo>
+                  <a:lnTo>
+                    <a:pt x="6016292" y="1034457"/>
+                  </a:lnTo>
+                  <a:lnTo>
+                    <a:pt x="6087914" y="1041011"/>
+                  </a:lnTo>
+                  <a:lnTo>
+                    <a:pt x="6159537" y="1047476"/>
+                  </a:lnTo>
+                  <a:lnTo>
+                    <a:pt x="6231159" y="1053855"/>
+                  </a:lnTo>
+                  <a:lnTo>
+                    <a:pt x="6302782" y="1060147"/>
+                  </a:lnTo>
+                  <a:lnTo>
+                    <a:pt x="6374404" y="1066355"/>
+                  </a:lnTo>
+                  <a:lnTo>
+                    <a:pt x="6446027" y="1072479"/>
+                  </a:lnTo>
+                  <a:lnTo>
+                    <a:pt x="6517649" y="1078520"/>
+                  </a:lnTo>
+                  <a:lnTo>
+                    <a:pt x="6589272" y="1084480"/>
+                  </a:lnTo>
+                  <a:lnTo>
+                    <a:pt x="6660894" y="1090359"/>
+                  </a:lnTo>
+                  <a:lnTo>
+                    <a:pt x="6732517" y="1096159"/>
+                  </a:lnTo>
+                  <a:lnTo>
+                    <a:pt x="6804139" y="1101881"/>
+                  </a:lnTo>
+                  <a:lnTo>
+                    <a:pt x="6875762" y="1107526"/>
+                  </a:lnTo>
+                  <a:lnTo>
+                    <a:pt x="6947385" y="1113094"/>
+                  </a:lnTo>
+                  <a:lnTo>
+                    <a:pt x="7019007" y="1118588"/>
+                  </a:lnTo>
+                  <a:lnTo>
+                    <a:pt x="7090630" y="1124007"/>
                   </a:lnTo>
                 </a:path>
               </a:pathLst>
@@ -4660,7 +4660,7 @@
           </p:nvSpPr>
           <p:spPr>
             <a:xfrm>
-              <a:off x="4363883" y="2073503"/>
+              <a:off x="4368185" y="2073503"/>
               <a:ext cx="0" cy="3649639"/>
             </a:xfrm>
             <a:custGeom>
@@ -4703,7 +4703,7 @@
           </p:nvSpPr>
           <p:spPr>
             <a:xfrm>
-              <a:off x="3178931" y="2073503"/>
+              <a:off x="3176242" y="2073503"/>
               <a:ext cx="0" cy="3649639"/>
             </a:xfrm>
             <a:custGeom>
@@ -4746,7 +4746,7 @@
           </p:nvSpPr>
           <p:spPr>
             <a:xfrm>
-              <a:off x="5373904" y="2073503"/>
+              <a:off x="5386913" y="2073503"/>
               <a:ext cx="0" cy="3649639"/>
             </a:xfrm>
             <a:custGeom>
@@ -5019,7 +5019,7 @@
           </p:nvSpPr>
           <p:spPr>
             <a:xfrm>
-              <a:off x="1536080" y="5785772"/>
+              <a:off x="1536741" y="5785772"/>
               <a:ext cx="161574" cy="80101"/>
             </a:xfrm>
             <a:prstGeom prst="rect">
@@ -5065,7 +5065,7 @@
           </p:nvSpPr>
           <p:spPr>
             <a:xfrm>
-              <a:off x="3342736" y="5785772"/>
+              <a:off x="3341771" y="5785772"/>
               <a:ext cx="161574" cy="80101"/>
             </a:xfrm>
             <a:prstGeom prst="rect">
@@ -5111,7 +5111,7 @@
           </p:nvSpPr>
           <p:spPr>
             <a:xfrm>
-              <a:off x="5199088" y="5785772"/>
+              <a:off x="5196500" y="5785772"/>
               <a:ext cx="62179" cy="80101"/>
             </a:xfrm>
             <a:prstGeom prst="rect">
@@ -5157,7 +5157,7 @@
           </p:nvSpPr>
           <p:spPr>
             <a:xfrm>
-              <a:off x="6974654" y="5785772"/>
+              <a:off x="6970441" y="5785772"/>
               <a:ext cx="124358" cy="80101"/>
             </a:xfrm>
             <a:prstGeom prst="rect">
@@ -5328,7 +5328,7 @@
                   <a:latin typeface="Helvetica"/>
                   <a:cs typeface="Helvetica"/>
                 </a:rPr>
-                <a:t>subHR per 10 % decline: 1.18 (1.06-1.32), p_Bonf = 0.015 (n = 6)  |  per IQR decline (Δ = 24.3 %): 1.51 (1.16-1.97)  |  IQR: [-22.7, 1.6] %</a:t>
+                <a:t>subHR per 10 % decline: 1.19 (1.06-1.33), p_Bonf = 0.015 (n = 6)  |  per IQR decline (Δ = 24.5 %): 1.52 (1.16-2.00)  |  IQR: [-22.7, 1.8] %</a:t>
               </a:r>
             </a:p>
           </p:txBody>
